--- a/notes/second_part_pipeline_topologica/doc_scripts_1.0/pipeline_01_05.pptx
+++ b/notes/second_part_pipeline_topologica/doc_scripts_1.0/pipeline_01_05.pptx
@@ -5,7 +5,7 @@
     <p:sldMasterId id="2147483648" r:id="rId4"/>
   </p:sldMasterIdLst>
   <p:notesMasterIdLst>
-    <p:notesMasterId r:id="rId35"/>
+    <p:notesMasterId r:id="rId33"/>
   </p:notesMasterIdLst>
   <p:sldIdLst>
     <p:sldId id="256" r:id="rId5"/>
@@ -27,17 +27,15 @@
     <p:sldId id="272" r:id="rId21"/>
     <p:sldId id="273" r:id="rId22"/>
     <p:sldId id="274" r:id="rId23"/>
-    <p:sldId id="275" r:id="rId24"/>
-    <p:sldId id="276" r:id="rId25"/>
-    <p:sldId id="277" r:id="rId26"/>
-    <p:sldId id="278" r:id="rId27"/>
-    <p:sldId id="279" r:id="rId28"/>
-    <p:sldId id="280" r:id="rId29"/>
-    <p:sldId id="281" r:id="rId30"/>
-    <p:sldId id="282" r:id="rId31"/>
-    <p:sldId id="283" r:id="rId32"/>
-    <p:sldId id="284" r:id="rId33"/>
-    <p:sldId id="285" r:id="rId34"/>
+    <p:sldId id="276" r:id="rId24"/>
+    <p:sldId id="277" r:id="rId25"/>
+    <p:sldId id="278" r:id="rId26"/>
+    <p:sldId id="280" r:id="rId27"/>
+    <p:sldId id="281" r:id="rId28"/>
+    <p:sldId id="282" r:id="rId29"/>
+    <p:sldId id="283" r:id="rId30"/>
+    <p:sldId id="284" r:id="rId31"/>
+    <p:sldId id="285" r:id="rId32"/>
   </p:sldIdLst>
   <p:sldSz cx="12192000" cy="6858000"/>
   <p:notesSz cx="6858000" cy="12192000"/>
@@ -2030,90 +2028,6 @@
 </p:notes>
 </file>
 
-<file path=ppt/notesSlides/notesSlide29.xml><?xml version="1.0" encoding="utf-8"?>
-<p:notes xmlns:a="http://schemas.openxmlformats.org/drawingml/2006/main" xmlns:r="http://schemas.openxmlformats.org/officeDocument/2006/relationships" xmlns:p="http://schemas.openxmlformats.org/presentationml/2006/main">
-  <p:cSld>
-    <p:spTree>
-      <p:nvGrpSpPr>
-        <p:cNvPr id="1" name=""/>
-        <p:cNvGrpSpPr/>
-        <p:nvPr/>
-      </p:nvGrpSpPr>
-      <p:grpSpPr>
-        <a:xfrm>
-          <a:off x="0" y="0"/>
-          <a:ext cx="0" cy="0"/>
-          <a:chOff x="0" y="0"/>
-          <a:chExt cx="0" cy="0"/>
-        </a:xfrm>
-      </p:grpSpPr>
-      <p:sp>
-        <p:nvSpPr>
-          <p:cNvPr id="2" name="Slide Image Placeholder 1"/>
-          <p:cNvSpPr>
-            <a:spLocks noGrp="1" noRot="1" noChangeAspect="1"/>
-          </p:cNvSpPr>
-          <p:nvPr>
-            <p:ph type="sldImg"/>
-          </p:nvPr>
-        </p:nvSpPr>
-        <p:spPr/>
-      </p:sp>
-      <p:sp>
-        <p:nvSpPr>
-          <p:cNvPr id="3" name="Notes Placeholder 2"/>
-          <p:cNvSpPr>
-            <a:spLocks noGrp="1"/>
-          </p:cNvSpPr>
-          <p:nvPr>
-            <p:ph type="body" idx="1"/>
-          </p:nvPr>
-        </p:nvSpPr>
-        <p:spPr/>
-        <p:txBody>
-          <a:bodyPr/>
-          <a:lstStyle/>
-          <a:p>
-            <a:endParaRPr lang="en-US" dirty="0"/>
-          </a:p>
-        </p:txBody>
-      </p:sp>
-      <p:sp>
-        <p:nvSpPr>
-          <p:cNvPr id="4" name="Slide Number Placeholder 3"/>
-          <p:cNvSpPr>
-            <a:spLocks noGrp="1"/>
-          </p:cNvSpPr>
-          <p:nvPr>
-            <p:ph type="sldNum" sz="quarter" idx="10"/>
-          </p:nvPr>
-        </p:nvSpPr>
-        <p:spPr/>
-        <p:txBody>
-          <a:bodyPr/>
-          <a:lstStyle/>
-          <a:p>
-            <a:fld id="{F7021451-1387-4CA6-816F-3879F97B5CBC}" type="slidenum">
-              <a:rPr lang="en-US"/>
-              <a:t>29</a:t>
-            </a:fld>
-            <a:endParaRPr lang="en-US"/>
-          </a:p>
-        </p:txBody>
-      </p:sp>
-    </p:spTree>
-    <p:extLst>
-      <p:ext uri="{BB962C8B-B14F-4D97-AF65-F5344CB8AC3E}">
-        <p14:creationId xmlns:p14="http://schemas.microsoft.com/office/powerpoint/2010/main" val="1024086991"/>
-      </p:ext>
-    </p:extLst>
-  </p:cSld>
-  <p:clrMapOvr>
-    <a:masterClrMapping/>
-  </p:clrMapOvr>
-</p:notes>
-</file>
-
 <file path=ppt/notesSlides/notesSlide3.xml><?xml version="1.0" encoding="utf-8"?>
 <p:notes xmlns:a="http://schemas.openxmlformats.org/drawingml/2006/main" xmlns:r="http://schemas.openxmlformats.org/officeDocument/2006/relationships" xmlns:p="http://schemas.openxmlformats.org/presentationml/2006/main">
   <p:cSld>
@@ -2180,90 +2094,6 @@
             <a:fld id="{F7021451-1387-4CA6-816F-3879F97B5CBC}" type="slidenum">
               <a:rPr lang="en-US"/>
               <a:t>3</a:t>
-            </a:fld>
-            <a:endParaRPr lang="en-US"/>
-          </a:p>
-        </p:txBody>
-      </p:sp>
-    </p:spTree>
-    <p:extLst>
-      <p:ext uri="{BB962C8B-B14F-4D97-AF65-F5344CB8AC3E}">
-        <p14:creationId xmlns:p14="http://schemas.microsoft.com/office/powerpoint/2010/main" val="1024086991"/>
-      </p:ext>
-    </p:extLst>
-  </p:cSld>
-  <p:clrMapOvr>
-    <a:masterClrMapping/>
-  </p:clrMapOvr>
-</p:notes>
-</file>
-
-<file path=ppt/notesSlides/notesSlide30.xml><?xml version="1.0" encoding="utf-8"?>
-<p:notes xmlns:a="http://schemas.openxmlformats.org/drawingml/2006/main" xmlns:r="http://schemas.openxmlformats.org/officeDocument/2006/relationships" xmlns:p="http://schemas.openxmlformats.org/presentationml/2006/main">
-  <p:cSld>
-    <p:spTree>
-      <p:nvGrpSpPr>
-        <p:cNvPr id="1" name=""/>
-        <p:cNvGrpSpPr/>
-        <p:nvPr/>
-      </p:nvGrpSpPr>
-      <p:grpSpPr>
-        <a:xfrm>
-          <a:off x="0" y="0"/>
-          <a:ext cx="0" cy="0"/>
-          <a:chOff x="0" y="0"/>
-          <a:chExt cx="0" cy="0"/>
-        </a:xfrm>
-      </p:grpSpPr>
-      <p:sp>
-        <p:nvSpPr>
-          <p:cNvPr id="2" name="Slide Image Placeholder 1"/>
-          <p:cNvSpPr>
-            <a:spLocks noGrp="1" noRot="1" noChangeAspect="1"/>
-          </p:cNvSpPr>
-          <p:nvPr>
-            <p:ph type="sldImg"/>
-          </p:nvPr>
-        </p:nvSpPr>
-        <p:spPr/>
-      </p:sp>
-      <p:sp>
-        <p:nvSpPr>
-          <p:cNvPr id="3" name="Notes Placeholder 2"/>
-          <p:cNvSpPr>
-            <a:spLocks noGrp="1"/>
-          </p:cNvSpPr>
-          <p:nvPr>
-            <p:ph type="body" idx="1"/>
-          </p:nvPr>
-        </p:nvSpPr>
-        <p:spPr/>
-        <p:txBody>
-          <a:bodyPr/>
-          <a:lstStyle/>
-          <a:p>
-            <a:endParaRPr lang="en-US" dirty="0"/>
-          </a:p>
-        </p:txBody>
-      </p:sp>
-      <p:sp>
-        <p:nvSpPr>
-          <p:cNvPr id="4" name="Slide Number Placeholder 3"/>
-          <p:cNvSpPr>
-            <a:spLocks noGrp="1"/>
-          </p:cNvSpPr>
-          <p:nvPr>
-            <p:ph type="sldNum" sz="quarter" idx="10"/>
-          </p:nvPr>
-        </p:nvSpPr>
-        <p:spPr/>
-        <p:txBody>
-          <a:bodyPr/>
-          <a:lstStyle/>
-          <a:p>
-            <a:fld id="{F7021451-1387-4CA6-816F-3879F97B5CBC}" type="slidenum">
-              <a:rPr lang="en-US"/>
-              <a:t>30</a:t>
             </a:fld>
             <a:endParaRPr lang="en-US"/>
           </a:p>
@@ -3212,7 +3042,7 @@
                   <a:srgbClr val="67E8F9"/>
                 </a:solidFill>
               </a:rPr>
-              <a:t>Pipeline 2.0</a:t>
+              <a:t>Pipeline 1.0</a:t>
             </a:r>
             <a:endParaRPr lang="en-US" sz="1400" dirty="0"/>
           </a:p>
@@ -9563,7 +9393,7 @@
         </p:spPr>
         <p:txBody>
           <a:bodyPr wrap="square" lIns="0" tIns="0" rIns="0" bIns="0" rtlCol="0" anchor="ctr">
-            <a:normAutofit/>
+            <a:normAutofit fontScale="92500" lnSpcReduction="10000"/>
           </a:bodyPr>
           <a:lstStyle/>
           <a:p>
@@ -9571,14 +9401,14 @@
               <a:buNone/>
             </a:pPr>
             <a:r>
-              <a:rPr lang="en-US" sz="1320" b="1" dirty="0">
+              <a:rPr lang="en-US" b="1" dirty="0">
                 <a:solidFill>
                   <a:srgbClr val="111827"/>
                 </a:solidFill>
               </a:rPr>
               <a:t>Perché serve lo skeleton</a:t>
             </a:r>
-            <a:endParaRPr lang="en-US" sz="1320" dirty="0"/>
+            <a:endParaRPr lang="en-US" dirty="0"/>
           </a:p>
         </p:txBody>
       </p:sp>
@@ -9601,7 +9431,7 @@
         </p:spPr>
         <p:txBody>
           <a:bodyPr wrap="square" lIns="254" tIns="254" rIns="254" bIns="254" rtlCol="0" anchor="t">
-            <a:normAutofit fontScale="85000" lnSpcReduction="10000"/>
+            <a:noAutofit/>
           </a:bodyPr>
           <a:lstStyle/>
           <a:p>
@@ -9609,14 +9439,14 @@
               <a:buNone/>
             </a:pPr>
             <a:r>
-              <a:rPr lang="en-US" sz="1220" dirty="0">
+              <a:rPr lang="en-US" sz="1400" dirty="0">
                 <a:solidFill>
                   <a:srgbClr val="334155"/>
                 </a:solidFill>
               </a:rPr>
               <a:t>Il passo 05 deve ragionare su componenti connessi da fili. Lo skeleton rende i wire sottili, più facili da etichettare in connected components e più adatti al matching terminale→filo.</a:t>
             </a:r>
-            <a:endParaRPr lang="en-US" sz="1220" dirty="0"/>
+            <a:endParaRPr lang="en-US" sz="1400" dirty="0"/>
           </a:p>
         </p:txBody>
       </p:sp>
@@ -9970,14 +9800,14 @@
               <a:buNone/>
             </a:pPr>
             <a:r>
-              <a:rPr lang="en-US" sz="1230" b="1" dirty="0">
+              <a:rPr lang="en-US" sz="1400" b="1" dirty="0">
                 <a:solidFill>
                   <a:srgbClr val="111827"/>
                 </a:solidFill>
               </a:rPr>
               <a:t>Componenti non completamente mascherati</a:t>
             </a:r>
-            <a:endParaRPr lang="en-US" sz="1230" dirty="0"/>
+            <a:endParaRPr lang="en-US" sz="1400" dirty="0"/>
           </a:p>
         </p:txBody>
       </p:sp>
@@ -10040,14 +9870,14 @@
               <a:buNone/>
             </a:pPr>
             <a:r>
-              <a:rPr lang="en-US" sz="1230" dirty="0">
+              <a:rPr lang="en-US" sz="1400" dirty="0">
                 <a:solidFill>
                   <a:srgbClr val="111827"/>
                 </a:solidFill>
               </a:rPr>
               <a:t>il corpo del simbolo può restare nello skeleton e creare falsi corti.</a:t>
             </a:r>
-            <a:endParaRPr lang="en-US" sz="1230" dirty="0"/>
+            <a:endParaRPr lang="en-US" sz="1400" dirty="0"/>
           </a:p>
         </p:txBody>
       </p:sp>
@@ -10110,14 +9940,14 @@
               <a:buNone/>
             </a:pPr>
             <a:r>
-              <a:rPr lang="en-US" sz="1230" b="1" dirty="0">
+              <a:rPr lang="en-US" sz="1400" b="1" dirty="0">
                 <a:solidFill>
                   <a:srgbClr val="111827"/>
                 </a:solidFill>
               </a:rPr>
               <a:t>Terminali troppo cancellati</a:t>
             </a:r>
-            <a:endParaRPr lang="en-US" sz="1230" dirty="0"/>
+            <a:endParaRPr lang="en-US" sz="1400" dirty="0"/>
           </a:p>
         </p:txBody>
       </p:sp>
@@ -10180,14 +10010,14 @@
               <a:buNone/>
             </a:pPr>
             <a:r>
-              <a:rPr lang="en-US" sz="1230" dirty="0">
+              <a:rPr lang="en-US" sz="1400" dirty="0">
                 <a:solidFill>
                   <a:srgbClr val="111827"/>
                 </a:solidFill>
               </a:rPr>
               <a:t>se la keep zone è troppo piccola, il filo si spezza vicino al componente.</a:t>
             </a:r>
-            <a:endParaRPr lang="en-US" sz="1230" dirty="0"/>
+            <a:endParaRPr lang="en-US" sz="1400" dirty="0"/>
           </a:p>
         </p:txBody>
       </p:sp>
@@ -10250,14 +10080,14 @@
               <a:buNone/>
             </a:pPr>
             <a:r>
-              <a:rPr lang="en-US" sz="1230" b="1" dirty="0">
+              <a:rPr lang="en-US" sz="1400" b="1" dirty="0">
                 <a:solidFill>
                   <a:srgbClr val="111827"/>
                 </a:solidFill>
               </a:rPr>
               <a:t>Crossing e ponticelli</a:t>
             </a:r>
-            <a:endParaRPr lang="en-US" sz="1230" dirty="0"/>
+            <a:endParaRPr lang="en-US" sz="1400" dirty="0"/>
           </a:p>
         </p:txBody>
       </p:sp>
@@ -10312,7 +10142,7 @@
         </p:spPr>
         <p:txBody>
           <a:bodyPr wrap="square" lIns="127" tIns="127" rIns="127" bIns="127" rtlCol="0" anchor="ctr">
-            <a:normAutofit fontScale="92500"/>
+            <a:normAutofit/>
           </a:bodyPr>
           <a:lstStyle/>
           <a:p>
@@ -10320,14 +10150,14 @@
               <a:buNone/>
             </a:pPr>
             <a:r>
-              <a:rPr lang="en-US" sz="1230" dirty="0">
+              <a:rPr lang="en-US" sz="1200" dirty="0">
                 <a:solidFill>
                   <a:srgbClr val="111827"/>
                 </a:solidFill>
               </a:rPr>
               <a:t>lo skeleton può fondere fili che graficamente si incrociano ma non sono connessi.</a:t>
             </a:r>
-            <a:endParaRPr lang="en-US" sz="1230" dirty="0"/>
+            <a:endParaRPr lang="en-US" sz="1200" dirty="0"/>
           </a:p>
         </p:txBody>
       </p:sp>
@@ -10390,14 +10220,14 @@
               <a:buNone/>
             </a:pPr>
             <a:r>
-              <a:rPr lang="en-US" sz="1230" b="1" dirty="0">
+              <a:rPr lang="en-US" sz="1400" b="1" dirty="0">
                 <a:solidFill>
                   <a:srgbClr val="111827"/>
                 </a:solidFill>
               </a:rPr>
               <a:t>Simboli complessi</a:t>
             </a:r>
-            <a:endParaRPr lang="en-US" sz="1230" dirty="0"/>
+            <a:endParaRPr lang="en-US" sz="1400" dirty="0"/>
           </a:p>
         </p:txBody>
       </p:sp>
@@ -10452,7 +10282,7 @@
         </p:spPr>
         <p:txBody>
           <a:bodyPr wrap="square" lIns="127" tIns="127" rIns="127" bIns="127" rtlCol="0" anchor="ctr">
-            <a:normAutofit/>
+            <a:noAutofit/>
           </a:bodyPr>
           <a:lstStyle/>
           <a:p>
@@ -10460,14 +10290,14 @@
               <a:buNone/>
             </a:pPr>
             <a:r>
-              <a:rPr lang="en-US" sz="1230" dirty="0">
+              <a:rPr lang="en-US" sz="1400" dirty="0">
                 <a:solidFill>
                   <a:srgbClr val="111827"/>
                 </a:solidFill>
               </a:rPr>
               <a:t>transformer, analog meter, opamp e connettori richiedono parametri dedicati.</a:t>
             </a:r>
-            <a:endParaRPr lang="en-US" sz="1230" dirty="0"/>
+            <a:endParaRPr lang="en-US" sz="1400" dirty="0"/>
           </a:p>
         </p:txBody>
       </p:sp>
@@ -10868,7 +10698,7 @@
         </p:nvSpPr>
         <p:spPr>
           <a:xfrm>
-            <a:off x="1536192" y="1499616"/>
+            <a:off x="1536192" y="1211580"/>
             <a:ext cx="9509760" cy="411480"/>
           </a:xfrm>
           <a:prstGeom prst="rect">
@@ -10906,7 +10736,7 @@
         </p:nvSpPr>
         <p:spPr>
           <a:xfrm>
-            <a:off x="6885432" y="1444752"/>
+            <a:off x="6867144" y="1643620"/>
             <a:ext cx="4562856" cy="2505456"/>
           </a:xfrm>
           <a:prstGeom prst="roundRect">
@@ -10957,7 +10787,7 @@
         </p:blipFill>
         <p:spPr>
           <a:xfrm>
-            <a:off x="6903720" y="1464176"/>
+            <a:off x="6922008" y="1663044"/>
             <a:ext cx="4526280" cy="2466608"/>
           </a:xfrm>
           <a:prstGeom prst="rect">
@@ -11054,7 +10884,7 @@
         </p:spPr>
         <p:txBody>
           <a:bodyPr wrap="square" lIns="127" tIns="127" rIns="127" bIns="127" rtlCol="0" anchor="ctr">
-            <a:normAutofit fontScale="92500" lnSpcReduction="20000"/>
+            <a:noAutofit/>
           </a:bodyPr>
           <a:lstStyle/>
           <a:p>
@@ -11062,14 +10892,14 @@
               <a:buNone/>
             </a:pPr>
             <a:r>
-              <a:rPr lang="en-US" sz="1330" dirty="0">
+              <a:rPr lang="en-US" sz="1300" dirty="0">
                 <a:solidFill>
                   <a:srgbClr val="111827"/>
                 </a:solidFill>
               </a:rPr>
               <a:t>Ogni terminale viene agganciato al pixel di skeleton più vicino e coerente con la sua direzione.</a:t>
             </a:r>
-            <a:endParaRPr lang="en-US" sz="1330" dirty="0"/>
+            <a:endParaRPr lang="en-US" sz="1300" dirty="0"/>
           </a:p>
         </p:txBody>
       </p:sp>
@@ -11124,7 +10954,7 @@
         </p:spPr>
         <p:txBody>
           <a:bodyPr wrap="square" lIns="127" tIns="127" rIns="127" bIns="127" rtlCol="0" anchor="ctr">
-            <a:normAutofit fontScale="92500"/>
+            <a:noAutofit/>
           </a:bodyPr>
           <a:lstStyle/>
           <a:p>
@@ -11132,14 +10962,14 @@
               <a:buNone/>
             </a:pPr>
             <a:r>
-              <a:rPr lang="en-US" sz="1330" dirty="0">
+              <a:rPr lang="en-US" sz="1300" dirty="0">
                 <a:solidFill>
                   <a:srgbClr val="111827"/>
                 </a:solidFill>
               </a:rPr>
               <a:t>Le connected components dello skeleton diventano gruppi interni di terminali.</a:t>
             </a:r>
-            <a:endParaRPr lang="en-US" sz="1330" dirty="0"/>
+            <a:endParaRPr lang="en-US" sz="1300" dirty="0"/>
           </a:p>
         </p:txBody>
       </p:sp>
@@ -11194,7 +11024,7 @@
         </p:spPr>
         <p:txBody>
           <a:bodyPr wrap="square" lIns="127" tIns="127" rIns="127" bIns="127" rtlCol="0" anchor="ctr">
-            <a:normAutofit fontScale="92500" lnSpcReduction="20000"/>
+            <a:noAutofit/>
           </a:bodyPr>
           <a:lstStyle/>
           <a:p>
@@ -11202,14 +11032,14 @@
               <a:buNone/>
             </a:pPr>
             <a:r>
-              <a:rPr lang="en-US" sz="1330" dirty="0">
+              <a:rPr lang="en-US" sz="1300" dirty="0">
                 <a:solidFill>
                   <a:srgbClr val="111827"/>
                 </a:solidFill>
               </a:rPr>
               <a:t>Il JSON finale non salva net esplicite: salva componenti e graph terminale→terminali.</a:t>
             </a:r>
-            <a:endParaRPr lang="en-US" sz="1330" dirty="0"/>
+            <a:endParaRPr lang="en-US" sz="1300" dirty="0"/>
           </a:p>
         </p:txBody>
       </p:sp>
@@ -11272,14 +11102,14 @@
               <a:buNone/>
             </a:pPr>
             <a:r>
-              <a:rPr lang="en-US" sz="1330" dirty="0">
+              <a:rPr lang="en-US" sz="1300" dirty="0">
                 <a:solidFill>
                   <a:srgbClr val="111827"/>
                 </a:solidFill>
               </a:rPr>
               <a:t>Warnings separano terminali unmatched, unconnected e suspicious.</a:t>
             </a:r>
-            <a:endParaRPr lang="en-US" sz="1330" dirty="0"/>
+            <a:endParaRPr lang="en-US" sz="1300" dirty="0"/>
           </a:p>
         </p:txBody>
       </p:sp>
@@ -13175,1017 +13005,6 @@
 
 <file path=ppt/slides/slide20.xml><?xml version="1.0" encoding="utf-8"?>
 <p:sld xmlns:a="http://schemas.openxmlformats.org/drawingml/2006/main" xmlns:r="http://schemas.openxmlformats.org/officeDocument/2006/relationships" xmlns:p="http://schemas.openxmlformats.org/presentationml/2006/main">
-  <p:cSld name="Slide 20">
-    <p:bg>
-      <p:bgPr>
-        <a:solidFill>
-          <a:srgbClr val="FFFFFF"/>
-        </a:solidFill>
-        <a:effectLst/>
-      </p:bgPr>
-    </p:bg>
-    <p:spTree>
-      <p:nvGrpSpPr>
-        <p:cNvPr id="1" name=""/>
-        <p:cNvGrpSpPr/>
-        <p:nvPr/>
-      </p:nvGrpSpPr>
-      <p:grpSpPr>
-        <a:xfrm>
-          <a:off x="0" y="0"/>
-          <a:ext cx="0" cy="0"/>
-          <a:chOff x="0" y="0"/>
-          <a:chExt cx="0" cy="0"/>
-        </a:xfrm>
-      </p:grpSpPr>
-      <p:sp>
-        <p:nvSpPr>
-          <p:cNvPr id="2" name="Shape 0"/>
-          <p:cNvSpPr/>
-          <p:nvPr/>
-        </p:nvSpPr>
-        <p:spPr>
-          <a:xfrm>
-            <a:off x="0" y="0"/>
-            <a:ext cx="12191695" cy="384048"/>
-          </a:xfrm>
-          <a:prstGeom prst="rect">
-            <a:avLst/>
-          </a:prstGeom>
-          <a:solidFill>
-            <a:srgbClr val="0B1020"/>
-          </a:solidFill>
-          <a:ln w="12700">
-            <a:solidFill>
-              <a:srgbClr val="0B1020"/>
-            </a:solidFill>
-            <a:prstDash val="solid"/>
-          </a:ln>
-        </p:spPr>
-        <p:txBody>
-          <a:bodyPr/>
-          <a:lstStyle/>
-          <a:p>
-            <a:endParaRPr lang="it-IT"/>
-          </a:p>
-        </p:txBody>
-      </p:sp>
-      <p:sp>
-        <p:nvSpPr>
-          <p:cNvPr id="3" name="Text 1"/>
-          <p:cNvSpPr/>
-          <p:nvPr/>
-        </p:nvSpPr>
-        <p:spPr>
-          <a:xfrm>
-            <a:off x="411480" y="96012"/>
-            <a:ext cx="7863840" cy="182880"/>
-          </a:xfrm>
-          <a:prstGeom prst="rect">
-            <a:avLst/>
-          </a:prstGeom>
-          <a:noFill/>
-          <a:ln/>
-        </p:spPr>
-        <p:txBody>
-          <a:bodyPr wrap="square" lIns="0" tIns="0" rIns="0" bIns="0" rtlCol="0" anchor="ctr"/>
-          <a:lstStyle/>
-          <a:p>
-            <a:pPr marL="0" indent="0">
-              <a:buNone/>
-            </a:pPr>
-            <a:r>
-              <a:rPr lang="en-US" sz="850" b="1" dirty="0">
-                <a:solidFill>
-                  <a:srgbClr val="FFFFFF"/>
-                </a:solidFill>
-                <a:latin typeface="Aptos" pitchFamily="34" charset="0"/>
-                <a:ea typeface="Aptos" pitchFamily="34" charset="-122"/>
-                <a:cs typeface="Aptos" pitchFamily="34" charset="-120"/>
-              </a:rPr>
-              <a:t>05 · Build terminal graph</a:t>
-            </a:r>
-            <a:endParaRPr lang="en-US" sz="850" dirty="0"/>
-          </a:p>
-        </p:txBody>
-      </p:sp>
-      <p:sp>
-        <p:nvSpPr>
-          <p:cNvPr id="4" name="Text 2"/>
-          <p:cNvSpPr/>
-          <p:nvPr/>
-        </p:nvSpPr>
-        <p:spPr>
-          <a:xfrm>
-            <a:off x="11384280" y="73152"/>
-            <a:ext cx="411480" cy="201168"/>
-          </a:xfrm>
-          <a:prstGeom prst="rect">
-            <a:avLst/>
-          </a:prstGeom>
-          <a:noFill/>
-          <a:ln/>
-        </p:spPr>
-        <p:txBody>
-          <a:bodyPr wrap="square" lIns="0" tIns="0" rIns="0" bIns="0" rtlCol="0" anchor="ctr"/>
-          <a:lstStyle/>
-          <a:p>
-            <a:pPr marL="0" indent="0" algn="r">
-              <a:buNone/>
-            </a:pPr>
-            <a:r>
-              <a:rPr lang="en-US" sz="850" dirty="0">
-                <a:solidFill>
-                  <a:srgbClr val="A5F3FC"/>
-                </a:solidFill>
-              </a:rPr>
-              <a:t>20</a:t>
-            </a:r>
-            <a:endParaRPr lang="en-US" sz="850" dirty="0"/>
-          </a:p>
-        </p:txBody>
-      </p:sp>
-      <p:sp>
-        <p:nvSpPr>
-          <p:cNvPr id="5" name="Text 3"/>
-          <p:cNvSpPr/>
-          <p:nvPr/>
-        </p:nvSpPr>
-        <p:spPr>
-          <a:xfrm>
-            <a:off x="411480" y="6528816"/>
-            <a:ext cx="7863840" cy="164592"/>
-          </a:xfrm>
-          <a:prstGeom prst="rect">
-            <a:avLst/>
-          </a:prstGeom>
-          <a:noFill/>
-          <a:ln/>
-        </p:spPr>
-        <p:txBody>
-          <a:bodyPr wrap="square" lIns="0" tIns="0" rIns="0" bIns="0" rtlCol="0" anchor="ctr"/>
-          <a:lstStyle/>
-          <a:p>
-            <a:pPr marL="0" indent="0">
-              <a:buNone/>
-            </a:pPr>
-            <a:r>
-              <a:rPr lang="en-US" sz="750" dirty="0">
-                <a:solidFill>
-                  <a:srgbClr val="64748B"/>
-                </a:solidFill>
-              </a:rPr>
-              <a:t>Pipeline 2.0 · Script 01–05 · Diagrammi elettrici Object Detection</a:t>
-            </a:r>
-            <a:endParaRPr lang="en-US" sz="750" dirty="0"/>
-          </a:p>
-        </p:txBody>
-      </p:sp>
-      <p:sp>
-        <p:nvSpPr>
-          <p:cNvPr id="6" name="Text 4"/>
-          <p:cNvSpPr/>
-          <p:nvPr/>
-        </p:nvSpPr>
-        <p:spPr>
-          <a:xfrm>
-            <a:off x="9738360" y="6528816"/>
-            <a:ext cx="2057400" cy="164592"/>
-          </a:xfrm>
-          <a:prstGeom prst="rect">
-            <a:avLst/>
-          </a:prstGeom>
-          <a:noFill/>
-          <a:ln/>
-        </p:spPr>
-        <p:txBody>
-          <a:bodyPr wrap="square" lIns="0" tIns="0" rIns="0" bIns="0" rtlCol="0" anchor="ctr"/>
-          <a:lstStyle/>
-          <a:p>
-            <a:pPr marL="0" indent="0" algn="r">
-              <a:buNone/>
-            </a:pPr>
-            <a:r>
-              <a:rPr lang="en-US" sz="750" dirty="0">
-                <a:solidFill>
-                  <a:srgbClr val="64748B"/>
-                </a:solidFill>
-              </a:rPr>
-              <a:t>tesi / working deck</a:t>
-            </a:r>
-            <a:endParaRPr lang="en-US" sz="750" dirty="0"/>
-          </a:p>
-        </p:txBody>
-      </p:sp>
-      <p:sp>
-        <p:nvSpPr>
-          <p:cNvPr id="7" name="Text 5"/>
-          <p:cNvSpPr/>
-          <p:nvPr/>
-        </p:nvSpPr>
-        <p:spPr>
-          <a:xfrm>
-            <a:off x="502920" y="566928"/>
-            <a:ext cx="10698480" cy="411480"/>
-          </a:xfrm>
-          <a:prstGeom prst="rect">
-            <a:avLst/>
-          </a:prstGeom>
-          <a:noFill/>
-          <a:ln/>
-        </p:spPr>
-        <p:txBody>
-          <a:bodyPr wrap="square" lIns="0" tIns="0" rIns="0" bIns="0" rtlCol="0" anchor="ctr">
-            <a:normAutofit fontScale="92500" lnSpcReduction="10000"/>
-          </a:bodyPr>
-          <a:lstStyle/>
-          <a:p>
-            <a:pPr marL="0" indent="0">
-              <a:buNone/>
-            </a:pPr>
-            <a:r>
-              <a:rPr lang="en-US" sz="3000" b="1" dirty="0">
-                <a:solidFill>
-                  <a:srgbClr val="111827"/>
-                </a:solidFill>
-                <a:latin typeface="Aptos Display" pitchFamily="34" charset="0"/>
-                <a:ea typeface="Aptos Display" pitchFamily="34" charset="-122"/>
-                <a:cs typeface="Aptos Display" pitchFamily="34" charset="-120"/>
-              </a:rPr>
-              <a:t>Dal gruppo di label alla clique terminale-terminale</a:t>
-            </a:r>
-            <a:endParaRPr lang="en-US" sz="3000" dirty="0"/>
-          </a:p>
-        </p:txBody>
-      </p:sp>
-      <p:sp>
-        <p:nvSpPr>
-          <p:cNvPr id="8" name="Text 6"/>
-          <p:cNvSpPr/>
-          <p:nvPr/>
-        </p:nvSpPr>
-        <p:spPr>
-          <a:xfrm>
-            <a:off x="530352" y="1042416"/>
-            <a:ext cx="10698480" cy="182880"/>
-          </a:xfrm>
-          <a:prstGeom prst="rect">
-            <a:avLst/>
-          </a:prstGeom>
-          <a:noFill/>
-          <a:ln/>
-        </p:spPr>
-        <p:txBody>
-          <a:bodyPr wrap="square" lIns="0" tIns="0" rIns="0" bIns="0" rtlCol="0" anchor="ctr">
-            <a:normAutofit fontScale="92500" lnSpcReduction="10000"/>
-          </a:bodyPr>
-          <a:lstStyle/>
-          <a:p>
-            <a:pPr marL="0" indent="0">
-              <a:buNone/>
-            </a:pPr>
-            <a:r>
-              <a:rPr lang="en-US" sz="1400" dirty="0">
-                <a:solidFill>
-                  <a:srgbClr val="334155"/>
-                </a:solidFill>
-              </a:rPr>
-              <a:t>Nel JSON 05 non compaiono net: un nodo elettrico è rappresentato implicitamente come tutti-con-tutti.</a:t>
-            </a:r>
-            <a:endParaRPr lang="en-US" sz="1400" dirty="0"/>
-          </a:p>
-        </p:txBody>
-      </p:sp>
-      <p:sp>
-        <p:nvSpPr>
-          <p:cNvPr id="9" name="Shape 7"/>
-          <p:cNvSpPr/>
-          <p:nvPr/>
-        </p:nvSpPr>
-        <p:spPr>
-          <a:xfrm>
-            <a:off x="685800" y="1325880"/>
-            <a:ext cx="5623560" cy="3246120"/>
-          </a:xfrm>
-          <a:prstGeom prst="roundRect">
-            <a:avLst>
-              <a:gd name="adj" fmla="val 1408"/>
-            </a:avLst>
-          </a:prstGeom>
-          <a:solidFill>
-            <a:srgbClr val="0F172A"/>
-          </a:solidFill>
-          <a:ln w="12700">
-            <a:solidFill>
-              <a:srgbClr val="1E293B"/>
-            </a:solidFill>
-            <a:prstDash val="solid"/>
-          </a:ln>
-        </p:spPr>
-        <p:txBody>
-          <a:bodyPr/>
-          <a:lstStyle/>
-          <a:p>
-            <a:endParaRPr lang="it-IT"/>
-          </a:p>
-        </p:txBody>
-      </p:sp>
-      <p:sp>
-        <p:nvSpPr>
-          <p:cNvPr id="10" name="Text 8"/>
-          <p:cNvSpPr/>
-          <p:nvPr/>
-        </p:nvSpPr>
-        <p:spPr>
-          <a:xfrm>
-            <a:off x="832104" y="1463040"/>
-            <a:ext cx="5330952" cy="2971800"/>
-          </a:xfrm>
-          <a:prstGeom prst="rect">
-            <a:avLst/>
-          </a:prstGeom>
-          <a:noFill/>
-          <a:ln/>
-        </p:spPr>
-        <p:txBody>
-          <a:bodyPr wrap="square" lIns="0" tIns="0" rIns="0" bIns="0" rtlCol="0" anchor="ctr">
-            <a:normAutofit/>
-          </a:bodyPr>
-          <a:lstStyle/>
-          <a:p>
-            <a:pPr marL="0" indent="0">
-              <a:buNone/>
-            </a:pPr>
-            <a:r>
-              <a:rPr lang="en-US" sz="1400" dirty="0">
-                <a:solidFill>
-                  <a:srgbClr val="E2E8F0"/>
-                </a:solidFill>
-                <a:latin typeface="Consolas" pitchFamily="34" charset="0"/>
-                <a:ea typeface="Consolas" pitchFamily="34" charset="-122"/>
-                <a:cs typeface="Consolas" pitchFamily="34" charset="-120"/>
-              </a:rPr>
-              <a:t>A label with 3 terminals:</a:t>
-            </a:r>
-            <a:endParaRPr lang="en-US" sz="1400" dirty="0"/>
-          </a:p>
-          <a:p>
-            <a:pPr marL="0" indent="0">
-              <a:buNone/>
-            </a:pPr>
-            <a:r>
-              <a:rPr lang="en-US" sz="1400" dirty="0">
-                <a:solidFill>
-                  <a:srgbClr val="E2E8F0"/>
-                </a:solidFill>
-                <a:latin typeface="Consolas" pitchFamily="34" charset="0"/>
-                <a:ea typeface="Consolas" pitchFamily="34" charset="-122"/>
-                <a:cs typeface="Consolas" pitchFamily="34" charset="-120"/>
-              </a:rPr>
-              <a:t>[ resistor22.1_t1, capacitor4.1_t1, diode7.1_anode ]</a:t>
-            </a:r>
-            <a:endParaRPr lang="en-US" sz="1400" dirty="0"/>
-          </a:p>
-          <a:p>
-            <a:pPr marL="0" indent="0">
-              <a:buNone/>
-            </a:pPr>
-            <a:endParaRPr lang="en-US" sz="1400" dirty="0"/>
-          </a:p>
-          <a:p>
-            <a:pPr marL="0" indent="0">
-              <a:buNone/>
-            </a:pPr>
-            <a:r>
-              <a:rPr lang="en-US" sz="1400" dirty="0">
-                <a:solidFill>
-                  <a:srgbClr val="E2E8F0"/>
-                </a:solidFill>
-                <a:latin typeface="Consolas" pitchFamily="34" charset="0"/>
-                <a:ea typeface="Consolas" pitchFamily="34" charset="-122"/>
-                <a:cs typeface="Consolas" pitchFamily="34" charset="-120"/>
-              </a:rPr>
-              <a:t>becomes a clique:</a:t>
-            </a:r>
-            <a:endParaRPr lang="en-US" sz="1400" dirty="0"/>
-          </a:p>
-          <a:p>
-            <a:pPr marL="0" indent="0">
-              <a:buNone/>
-            </a:pPr>
-            <a:r>
-              <a:rPr lang="en-US" sz="1400" dirty="0">
-                <a:solidFill>
-                  <a:srgbClr val="E2E8F0"/>
-                </a:solidFill>
-                <a:latin typeface="Consolas" pitchFamily="34" charset="0"/>
-                <a:ea typeface="Consolas" pitchFamily="34" charset="-122"/>
-                <a:cs typeface="Consolas" pitchFamily="34" charset="-120"/>
-              </a:rPr>
-              <a:t>resistor22.1_t1 -&gt; [capacitor4.1_t1, diode7.1_anode]</a:t>
-            </a:r>
-            <a:endParaRPr lang="en-US" sz="1400" dirty="0"/>
-          </a:p>
-          <a:p>
-            <a:pPr marL="0" indent="0">
-              <a:buNone/>
-            </a:pPr>
-            <a:r>
-              <a:rPr lang="en-US" sz="1400" dirty="0">
-                <a:solidFill>
-                  <a:srgbClr val="E2E8F0"/>
-                </a:solidFill>
-                <a:latin typeface="Consolas" pitchFamily="34" charset="0"/>
-                <a:ea typeface="Consolas" pitchFamily="34" charset="-122"/>
-                <a:cs typeface="Consolas" pitchFamily="34" charset="-120"/>
-              </a:rPr>
-              <a:t>capacitor4.1_t1 -&gt; [resistor22.1_t1, diode7.1_anode]</a:t>
-            </a:r>
-            <a:endParaRPr lang="en-US" sz="1400" dirty="0"/>
-          </a:p>
-          <a:p>
-            <a:pPr marL="0" indent="0">
-              <a:buNone/>
-            </a:pPr>
-            <a:r>
-              <a:rPr lang="en-US" sz="1400" dirty="0">
-                <a:solidFill>
-                  <a:srgbClr val="E2E8F0"/>
-                </a:solidFill>
-                <a:latin typeface="Consolas" pitchFamily="34" charset="0"/>
-                <a:ea typeface="Consolas" pitchFamily="34" charset="-122"/>
-                <a:cs typeface="Consolas" pitchFamily="34" charset="-120"/>
-              </a:rPr>
-              <a:t>diode7.1_anode -&gt; [resistor22.1_t1, capacitor4.1_t1]</a:t>
-            </a:r>
-            <a:endParaRPr lang="en-US" sz="1400" dirty="0"/>
-          </a:p>
-        </p:txBody>
-      </p:sp>
-      <p:sp>
-        <p:nvSpPr>
-          <p:cNvPr id="11" name="Shape 9"/>
-          <p:cNvSpPr/>
-          <p:nvPr/>
-        </p:nvSpPr>
-        <p:spPr>
-          <a:xfrm>
-            <a:off x="7955280" y="2057400"/>
-            <a:ext cx="1828800" cy="0"/>
-          </a:xfrm>
-          <a:prstGeom prst="line">
-            <a:avLst/>
-          </a:prstGeom>
-          <a:noFill/>
-          <a:ln w="25400">
-            <a:solidFill>
-              <a:srgbClr val="1BAEDB"/>
-            </a:solidFill>
-            <a:prstDash val="solid"/>
-          </a:ln>
-        </p:spPr>
-        <p:txBody>
-          <a:bodyPr/>
-          <a:lstStyle/>
-          <a:p>
-            <a:endParaRPr lang="it-IT"/>
-          </a:p>
-        </p:txBody>
-      </p:sp>
-      <p:sp>
-        <p:nvSpPr>
-          <p:cNvPr id="12" name="Shape 10"/>
-          <p:cNvSpPr/>
-          <p:nvPr/>
-        </p:nvSpPr>
-        <p:spPr>
-          <a:xfrm>
-            <a:off x="7936992" y="2121407"/>
-            <a:ext cx="896112" cy="1700783"/>
-          </a:xfrm>
-          <a:prstGeom prst="line">
-            <a:avLst/>
-          </a:prstGeom>
-          <a:noFill/>
-          <a:ln w="25400">
-            <a:solidFill>
-              <a:srgbClr val="1BAEDB"/>
-            </a:solidFill>
-            <a:prstDash val="solid"/>
-          </a:ln>
-        </p:spPr>
-        <p:txBody>
-          <a:bodyPr/>
-          <a:lstStyle/>
-          <a:p>
-            <a:endParaRPr lang="it-IT"/>
-          </a:p>
-        </p:txBody>
-      </p:sp>
-      <p:sp>
-        <p:nvSpPr>
-          <p:cNvPr id="13" name="Shape 11"/>
-          <p:cNvSpPr/>
-          <p:nvPr/>
-        </p:nvSpPr>
-        <p:spPr>
-          <a:xfrm flipH="1">
-            <a:off x="9281158" y="2258568"/>
-            <a:ext cx="758953" cy="1645919"/>
-          </a:xfrm>
-          <a:prstGeom prst="line">
-            <a:avLst/>
-          </a:prstGeom>
-          <a:noFill/>
-          <a:ln w="25400">
-            <a:solidFill>
-              <a:srgbClr val="1BAEDB"/>
-            </a:solidFill>
-            <a:prstDash val="solid"/>
-          </a:ln>
-        </p:spPr>
-        <p:txBody>
-          <a:bodyPr/>
-          <a:lstStyle/>
-          <a:p>
-            <a:endParaRPr lang="it-IT"/>
-          </a:p>
-        </p:txBody>
-      </p:sp>
-      <p:sp>
-        <p:nvSpPr>
-          <p:cNvPr id="14" name="Shape 12"/>
-          <p:cNvSpPr/>
-          <p:nvPr/>
-        </p:nvSpPr>
-        <p:spPr>
-          <a:xfrm>
-            <a:off x="7680960" y="1783080"/>
-            <a:ext cx="512064" cy="512064"/>
-          </a:xfrm>
-          <a:prstGeom prst="ellipse">
-            <a:avLst/>
-          </a:prstGeom>
-          <a:solidFill>
-            <a:srgbClr val="FFFFFF"/>
-          </a:solidFill>
-          <a:ln w="25400">
-            <a:solidFill>
-              <a:srgbClr val="F97373"/>
-            </a:solidFill>
-            <a:prstDash val="solid"/>
-          </a:ln>
-        </p:spPr>
-        <p:txBody>
-          <a:bodyPr/>
-          <a:lstStyle/>
-          <a:p>
-            <a:endParaRPr lang="it-IT"/>
-          </a:p>
-        </p:txBody>
-      </p:sp>
-      <p:sp>
-        <p:nvSpPr>
-          <p:cNvPr id="15" name="Text 13"/>
-          <p:cNvSpPr/>
-          <p:nvPr/>
-        </p:nvSpPr>
-        <p:spPr>
-          <a:xfrm>
-            <a:off x="7680960" y="1938528"/>
-            <a:ext cx="512064" cy="91440"/>
-          </a:xfrm>
-          <a:prstGeom prst="rect">
-            <a:avLst/>
-          </a:prstGeom>
-          <a:noFill/>
-          <a:ln/>
-        </p:spPr>
-        <p:txBody>
-          <a:bodyPr wrap="square" lIns="0" tIns="0" rIns="0" bIns="0" rtlCol="0" anchor="ctr"/>
-          <a:lstStyle/>
-          <a:p>
-            <a:pPr marL="0" indent="0" algn="ctr">
-              <a:buNone/>
-            </a:pPr>
-            <a:r>
-              <a:rPr lang="en-US" sz="1200" b="1" dirty="0">
-                <a:solidFill>
-                  <a:srgbClr val="F97373"/>
-                </a:solidFill>
-              </a:rPr>
-              <a:t>A</a:t>
-            </a:r>
-            <a:endParaRPr lang="en-US" sz="1200" dirty="0"/>
-          </a:p>
-        </p:txBody>
-      </p:sp>
-      <p:sp>
-        <p:nvSpPr>
-          <p:cNvPr id="16" name="Shape 14"/>
-          <p:cNvSpPr/>
-          <p:nvPr/>
-        </p:nvSpPr>
-        <p:spPr>
-          <a:xfrm>
-            <a:off x="9784080" y="1783080"/>
-            <a:ext cx="512064" cy="512064"/>
-          </a:xfrm>
-          <a:prstGeom prst="ellipse">
-            <a:avLst/>
-          </a:prstGeom>
-          <a:solidFill>
-            <a:srgbClr val="FFFFFF"/>
-          </a:solidFill>
-          <a:ln w="25400">
-            <a:solidFill>
-              <a:srgbClr val="F97373"/>
-            </a:solidFill>
-            <a:prstDash val="solid"/>
-          </a:ln>
-        </p:spPr>
-        <p:txBody>
-          <a:bodyPr/>
-          <a:lstStyle/>
-          <a:p>
-            <a:endParaRPr lang="it-IT"/>
-          </a:p>
-        </p:txBody>
-      </p:sp>
-      <p:sp>
-        <p:nvSpPr>
-          <p:cNvPr id="17" name="Text 15"/>
-          <p:cNvSpPr/>
-          <p:nvPr/>
-        </p:nvSpPr>
-        <p:spPr>
-          <a:xfrm>
-            <a:off x="9784080" y="1938528"/>
-            <a:ext cx="512064" cy="91440"/>
-          </a:xfrm>
-          <a:prstGeom prst="rect">
-            <a:avLst/>
-          </a:prstGeom>
-          <a:noFill/>
-          <a:ln/>
-        </p:spPr>
-        <p:txBody>
-          <a:bodyPr wrap="square" lIns="0" tIns="0" rIns="0" bIns="0" rtlCol="0" anchor="ctr"/>
-          <a:lstStyle/>
-          <a:p>
-            <a:pPr marL="0" indent="0" algn="ctr">
-              <a:buNone/>
-            </a:pPr>
-            <a:r>
-              <a:rPr lang="en-US" sz="1200" b="1" dirty="0">
-                <a:solidFill>
-                  <a:srgbClr val="F97373"/>
-                </a:solidFill>
-              </a:rPr>
-              <a:t>B</a:t>
-            </a:r>
-            <a:endParaRPr lang="en-US" sz="1200" dirty="0"/>
-          </a:p>
-        </p:txBody>
-      </p:sp>
-      <p:sp>
-        <p:nvSpPr>
-          <p:cNvPr id="18" name="Shape 16"/>
-          <p:cNvSpPr/>
-          <p:nvPr/>
-        </p:nvSpPr>
-        <p:spPr>
-          <a:xfrm>
-            <a:off x="8732520" y="3749040"/>
-            <a:ext cx="512064" cy="512064"/>
-          </a:xfrm>
-          <a:prstGeom prst="ellipse">
-            <a:avLst/>
-          </a:prstGeom>
-          <a:solidFill>
-            <a:srgbClr val="FFFFFF"/>
-          </a:solidFill>
-          <a:ln w="25400">
-            <a:solidFill>
-              <a:srgbClr val="F97373"/>
-            </a:solidFill>
-            <a:prstDash val="solid"/>
-          </a:ln>
-        </p:spPr>
-        <p:txBody>
-          <a:bodyPr/>
-          <a:lstStyle/>
-          <a:p>
-            <a:endParaRPr lang="it-IT"/>
-          </a:p>
-        </p:txBody>
-      </p:sp>
-      <p:sp>
-        <p:nvSpPr>
-          <p:cNvPr id="19" name="Text 17"/>
-          <p:cNvSpPr/>
-          <p:nvPr/>
-        </p:nvSpPr>
-        <p:spPr>
-          <a:xfrm>
-            <a:off x="8732520" y="3904488"/>
-            <a:ext cx="512064" cy="91440"/>
-          </a:xfrm>
-          <a:prstGeom prst="rect">
-            <a:avLst/>
-          </a:prstGeom>
-          <a:noFill/>
-          <a:ln/>
-        </p:spPr>
-        <p:txBody>
-          <a:bodyPr wrap="square" lIns="0" tIns="0" rIns="0" bIns="0" rtlCol="0" anchor="ctr"/>
-          <a:lstStyle/>
-          <a:p>
-            <a:pPr marL="0" indent="0" algn="ctr">
-              <a:buNone/>
-            </a:pPr>
-            <a:r>
-              <a:rPr lang="en-US" sz="1200" b="1" dirty="0">
-                <a:solidFill>
-                  <a:srgbClr val="F97373"/>
-                </a:solidFill>
-              </a:rPr>
-              <a:t>C</a:t>
-            </a:r>
-            <a:endParaRPr lang="en-US" sz="1200" dirty="0"/>
-          </a:p>
-        </p:txBody>
-      </p:sp>
-      <p:sp>
-        <p:nvSpPr>
-          <p:cNvPr id="20" name="Text 18"/>
-          <p:cNvSpPr/>
-          <p:nvPr/>
-        </p:nvSpPr>
-        <p:spPr>
-          <a:xfrm>
-            <a:off x="8439912" y="4419351"/>
-            <a:ext cx="1097280" cy="228600"/>
-          </a:xfrm>
-          <a:prstGeom prst="rect">
-            <a:avLst/>
-          </a:prstGeom>
-          <a:noFill/>
-          <a:ln/>
-        </p:spPr>
-        <p:txBody>
-          <a:bodyPr wrap="square" lIns="0" tIns="0" rIns="0" bIns="0" rtlCol="0" anchor="ctr"/>
-          <a:lstStyle/>
-          <a:p>
-            <a:pPr marL="0" indent="0" algn="ctr">
-              <a:buNone/>
-            </a:pPr>
-            <a:r>
-              <a:rPr lang="en-US" sz="1400" b="1" dirty="0">
-                <a:solidFill>
-                  <a:srgbClr val="F97373"/>
-                </a:solidFill>
-              </a:rPr>
-              <a:t>clique</a:t>
-            </a:r>
-            <a:endParaRPr lang="en-US" sz="1400" dirty="0"/>
-          </a:p>
-        </p:txBody>
-      </p:sp>
-      <p:sp>
-        <p:nvSpPr>
-          <p:cNvPr id="21" name="Shape 19"/>
-          <p:cNvSpPr/>
-          <p:nvPr/>
-        </p:nvSpPr>
-        <p:spPr>
-          <a:xfrm>
-            <a:off x="6903720" y="4956048"/>
-            <a:ext cx="2194560" cy="859536"/>
-          </a:xfrm>
-          <a:prstGeom prst="roundRect">
-            <a:avLst>
-              <a:gd name="adj" fmla="val 12308"/>
-            </a:avLst>
-          </a:prstGeom>
-          <a:solidFill>
-            <a:srgbClr val="DCFCE7"/>
-          </a:solidFill>
-          <a:ln w="12700">
-            <a:solidFill>
-              <a:srgbClr val="BBF7D0">
-                <a:alpha val="85000"/>
-              </a:srgbClr>
-            </a:solidFill>
-            <a:prstDash val="solid"/>
-          </a:ln>
-        </p:spPr>
-        <p:txBody>
-          <a:bodyPr/>
-          <a:lstStyle/>
-          <a:p>
-            <a:endParaRPr lang="it-IT"/>
-          </a:p>
-        </p:txBody>
-      </p:sp>
-      <p:sp>
-        <p:nvSpPr>
-          <p:cNvPr id="22" name="Text 20"/>
-          <p:cNvSpPr/>
-          <p:nvPr/>
-        </p:nvSpPr>
-        <p:spPr>
-          <a:xfrm>
-            <a:off x="7068312" y="5102352"/>
-            <a:ext cx="1865376" cy="246888"/>
-          </a:xfrm>
-          <a:prstGeom prst="rect">
-            <a:avLst/>
-          </a:prstGeom>
-          <a:noFill/>
-          <a:ln/>
-        </p:spPr>
-        <p:txBody>
-          <a:bodyPr wrap="square" lIns="0" tIns="0" rIns="0" bIns="0" rtlCol="0" anchor="ctr">
-            <a:normAutofit/>
-          </a:bodyPr>
-          <a:lstStyle/>
-          <a:p>
-            <a:pPr marL="0" indent="0">
-              <a:buNone/>
-            </a:pPr>
-            <a:r>
-              <a:rPr lang="en-US" sz="1320" b="1" dirty="0">
-                <a:solidFill>
-                  <a:srgbClr val="111827"/>
-                </a:solidFill>
-              </a:rPr>
-              <a:t>Vantaggio</a:t>
-            </a:r>
-            <a:endParaRPr lang="en-US" sz="1320" dirty="0"/>
-          </a:p>
-        </p:txBody>
-      </p:sp>
-      <p:sp>
-        <p:nvSpPr>
-          <p:cNvPr id="23" name="Text 21"/>
-          <p:cNvSpPr/>
-          <p:nvPr/>
-        </p:nvSpPr>
-        <p:spPr>
-          <a:xfrm>
-            <a:off x="7068312" y="5431536"/>
-            <a:ext cx="1865376" cy="27432"/>
-          </a:xfrm>
-          <a:prstGeom prst="rect">
-            <a:avLst/>
-          </a:prstGeom>
-          <a:noFill/>
-          <a:ln/>
-        </p:spPr>
-        <p:txBody>
-          <a:bodyPr wrap="square" lIns="254" tIns="254" rIns="254" bIns="254" rtlCol="0" anchor="t">
-            <a:normAutofit fontScale="25000" lnSpcReduction="20000"/>
-          </a:bodyPr>
-          <a:lstStyle/>
-          <a:p>
-            <a:pPr marL="0" indent="0">
-              <a:buNone/>
-            </a:pPr>
-            <a:r>
-              <a:rPr lang="en-US" sz="960" dirty="0">
-                <a:solidFill>
-                  <a:srgbClr val="334155"/>
-                </a:solidFill>
-              </a:rPr>
-              <a:t>Formato semplice, diretto, facile da mandare a una AI.</a:t>
-            </a:r>
-            <a:endParaRPr lang="en-US" sz="960" dirty="0"/>
-          </a:p>
-        </p:txBody>
-      </p:sp>
-      <p:sp>
-        <p:nvSpPr>
-          <p:cNvPr id="24" name="Shape 22"/>
-          <p:cNvSpPr/>
-          <p:nvPr/>
-        </p:nvSpPr>
-        <p:spPr>
-          <a:xfrm>
-            <a:off x="9281159" y="4956048"/>
-            <a:ext cx="2194545" cy="859536"/>
-          </a:xfrm>
-          <a:prstGeom prst="roundRect">
-            <a:avLst>
-              <a:gd name="adj" fmla="val 12308"/>
-            </a:avLst>
-          </a:prstGeom>
-          <a:solidFill>
-            <a:srgbClr val="FEE2E2"/>
-          </a:solidFill>
-          <a:ln w="12700">
-            <a:solidFill>
-              <a:srgbClr val="FECACA">
-                <a:alpha val="85000"/>
-              </a:srgbClr>
-            </a:solidFill>
-            <a:prstDash val="solid"/>
-          </a:ln>
-        </p:spPr>
-        <p:txBody>
-          <a:bodyPr/>
-          <a:lstStyle/>
-          <a:p>
-            <a:endParaRPr lang="it-IT"/>
-          </a:p>
-        </p:txBody>
-      </p:sp>
-      <p:sp>
-        <p:nvSpPr>
-          <p:cNvPr id="25" name="Text 23"/>
-          <p:cNvSpPr/>
-          <p:nvPr/>
-        </p:nvSpPr>
-        <p:spPr>
-          <a:xfrm>
-            <a:off x="9445752" y="5102352"/>
-            <a:ext cx="1819656" cy="246888"/>
-          </a:xfrm>
-          <a:prstGeom prst="rect">
-            <a:avLst/>
-          </a:prstGeom>
-          <a:noFill/>
-          <a:ln/>
-        </p:spPr>
-        <p:txBody>
-          <a:bodyPr wrap="square" lIns="0" tIns="0" rIns="0" bIns="0" rtlCol="0" anchor="ctr">
-            <a:normAutofit/>
-          </a:bodyPr>
-          <a:lstStyle/>
-          <a:p>
-            <a:pPr marL="0" indent="0">
-              <a:buNone/>
-            </a:pPr>
-            <a:r>
-              <a:rPr lang="en-US" sz="1320" b="1" dirty="0">
-                <a:solidFill>
-                  <a:srgbClr val="111827"/>
-                </a:solidFill>
-              </a:rPr>
-              <a:t>Limite</a:t>
-            </a:r>
-            <a:endParaRPr lang="en-US" sz="1320" dirty="0"/>
-          </a:p>
-        </p:txBody>
-      </p:sp>
-      <p:sp>
-        <p:nvSpPr>
-          <p:cNvPr id="26" name="Text 24"/>
-          <p:cNvSpPr/>
-          <p:nvPr/>
-        </p:nvSpPr>
-        <p:spPr>
-          <a:xfrm>
-            <a:off x="9445752" y="5431536"/>
-            <a:ext cx="1819656" cy="27432"/>
-          </a:xfrm>
-          <a:prstGeom prst="rect">
-            <a:avLst/>
-          </a:prstGeom>
-          <a:noFill/>
-          <a:ln/>
-        </p:spPr>
-        <p:txBody>
-          <a:bodyPr wrap="square" lIns="254" tIns="254" rIns="254" bIns="254" rtlCol="0" anchor="t">
-            <a:normAutofit fontScale="25000" lnSpcReduction="20000"/>
-          </a:bodyPr>
-          <a:lstStyle/>
-          <a:p>
-            <a:pPr marL="0" indent="0">
-              <a:buNone/>
-            </a:pPr>
-            <a:r>
-              <a:rPr lang="en-US" sz="960" dirty="0">
-                <a:solidFill>
-                  <a:srgbClr val="334155"/>
-                </a:solidFill>
-              </a:rPr>
-              <a:t>Un nodo con molti terminali genera molte relazioni duplicate.</a:t>
-            </a:r>
-            <a:endParaRPr lang="en-US" sz="960" dirty="0"/>
-          </a:p>
-        </p:txBody>
-      </p:sp>
-    </p:spTree>
-  </p:cSld>
-  <p:clrMapOvr>
-    <a:masterClrMapping/>
-  </p:clrMapOvr>
-</p:sld>
-</file>
-
-<file path=ppt/slides/slide21.xml><?xml version="1.0" encoding="utf-8"?>
-<p:sld xmlns:a="http://schemas.openxmlformats.org/drawingml/2006/main" xmlns:r="http://schemas.openxmlformats.org/officeDocument/2006/relationships" xmlns:p="http://schemas.openxmlformats.org/presentationml/2006/main">
   <p:cSld name="Slide 21">
     <p:bg>
       <p:bgPr>
@@ -14916,7 +13735,7 @@
 </p:sld>
 </file>
 
-<file path=ppt/slides/slide22.xml><?xml version="1.0" encoding="utf-8"?>
+<file path=ppt/slides/slide21.xml><?xml version="1.0" encoding="utf-8"?>
 <p:sld xmlns:a="http://schemas.openxmlformats.org/drawingml/2006/main" xmlns:r="http://schemas.openxmlformats.org/officeDocument/2006/relationships" xmlns:p="http://schemas.openxmlformats.org/presentationml/2006/main">
   <p:cSld name="Slide 22">
     <p:bg>
@@ -15946,7 +14765,7 @@
 </p:sld>
 </file>
 
-<file path=ppt/slides/slide23.xml><?xml version="1.0" encoding="utf-8"?>
+<file path=ppt/slides/slide22.xml><?xml version="1.0" encoding="utf-8"?>
 <p:sld xmlns:a="http://schemas.openxmlformats.org/drawingml/2006/main" xmlns:r="http://schemas.openxmlformats.org/officeDocument/2006/relationships" xmlns:p="http://schemas.openxmlformats.org/presentationml/2006/main">
   <p:cSld name="Slide 23">
     <p:bg>
@@ -16954,7 +15773,7 @@
         </p:spPr>
         <p:txBody>
           <a:bodyPr wrap="square" lIns="254" tIns="254" rIns="254" bIns="254" rtlCol="0" anchor="t">
-            <a:normAutofit fontScale="92500" lnSpcReduction="20000"/>
+            <a:noAutofit/>
           </a:bodyPr>
           <a:lstStyle/>
           <a:p>
@@ -16962,14 +15781,14 @@
               <a:buNone/>
             </a:pPr>
             <a:r>
-              <a:rPr lang="en-US" sz="1230" dirty="0">
+              <a:rPr lang="en-US" sz="1200" dirty="0">
                 <a:solidFill>
                   <a:srgbClr val="334155"/>
                 </a:solidFill>
               </a:rPr>
               <a:t>Connettore a 4 pin, switch aperto verso GND, ramo LED con resistenza e ramo lampada con resistenza, ritorno comune a destra.</a:t>
             </a:r>
-            <a:endParaRPr lang="en-US" sz="1230" dirty="0"/>
+            <a:endParaRPr lang="en-US" sz="1200" dirty="0"/>
           </a:p>
         </p:txBody>
       </p:sp>
@@ -17005,7 +15824,7 @@
           <a:bodyPr/>
           <a:lstStyle/>
           <a:p>
-            <a:endParaRPr lang="it-IT"/>
+            <a:endParaRPr lang="it-IT" dirty="0"/>
           </a:p>
         </p:txBody>
       </p:sp>
@@ -17066,7 +15885,7 @@
         </p:spPr>
         <p:txBody>
           <a:bodyPr wrap="square" lIns="254" tIns="254" rIns="254" bIns="254" rtlCol="0" anchor="t">
-            <a:normAutofit fontScale="62500" lnSpcReduction="20000"/>
+            <a:noAutofit/>
           </a:bodyPr>
           <a:lstStyle/>
           <a:p>
@@ -17074,14 +15893,14 @@
               <a:buNone/>
             </a:pPr>
             <a:r>
-              <a:rPr lang="en-US" sz="1170" dirty="0">
+              <a:rPr lang="en-US" sz="1200" dirty="0">
                 <a:solidFill>
                   <a:srgbClr val="334155"/>
                 </a:solidFill>
               </a:rPr>
               <a:t>Simboli GND multipli possono restare nodi distinti se non vengono normalizzati semanticamente.</a:t>
             </a:r>
-            <a:endParaRPr lang="en-US" sz="1170" dirty="0"/>
+            <a:endParaRPr lang="en-US" sz="1200" dirty="0"/>
           </a:p>
         </p:txBody>
       </p:sp>
@@ -17093,790 +15912,7 @@
 </p:sld>
 </file>
 
-<file path=ppt/slides/slide24.xml><?xml version="1.0" encoding="utf-8"?>
-<p:sld xmlns:a="http://schemas.openxmlformats.org/drawingml/2006/main" xmlns:r="http://schemas.openxmlformats.org/officeDocument/2006/relationships" xmlns:p="http://schemas.openxmlformats.org/presentationml/2006/main">
-  <p:cSld name="Slide 24">
-    <p:bg>
-      <p:bgPr>
-        <a:solidFill>
-          <a:srgbClr val="FFFFFF"/>
-        </a:solidFill>
-        <a:effectLst/>
-      </p:bgPr>
-    </p:bg>
-    <p:spTree>
-      <p:nvGrpSpPr>
-        <p:cNvPr id="1" name=""/>
-        <p:cNvGrpSpPr/>
-        <p:nvPr/>
-      </p:nvGrpSpPr>
-      <p:grpSpPr>
-        <a:xfrm>
-          <a:off x="0" y="0"/>
-          <a:ext cx="0" cy="0"/>
-          <a:chOff x="0" y="0"/>
-          <a:chExt cx="0" cy="0"/>
-        </a:xfrm>
-      </p:grpSpPr>
-      <p:sp>
-        <p:nvSpPr>
-          <p:cNvPr id="2" name="Shape 0"/>
-          <p:cNvSpPr/>
-          <p:nvPr/>
-        </p:nvSpPr>
-        <p:spPr>
-          <a:xfrm>
-            <a:off x="0" y="0"/>
-            <a:ext cx="12191695" cy="384048"/>
-          </a:xfrm>
-          <a:prstGeom prst="rect">
-            <a:avLst/>
-          </a:prstGeom>
-          <a:solidFill>
-            <a:srgbClr val="0B1020"/>
-          </a:solidFill>
-          <a:ln w="12700">
-            <a:solidFill>
-              <a:srgbClr val="0B1020"/>
-            </a:solidFill>
-            <a:prstDash val="solid"/>
-          </a:ln>
-        </p:spPr>
-        <p:txBody>
-          <a:bodyPr/>
-          <a:lstStyle/>
-          <a:p>
-            <a:endParaRPr lang="it-IT"/>
-          </a:p>
-        </p:txBody>
-      </p:sp>
-      <p:sp>
-        <p:nvSpPr>
-          <p:cNvPr id="3" name="Text 1"/>
-          <p:cNvSpPr/>
-          <p:nvPr/>
-        </p:nvSpPr>
-        <p:spPr>
-          <a:xfrm>
-            <a:off x="411480" y="96012"/>
-            <a:ext cx="7863840" cy="182880"/>
-          </a:xfrm>
-          <a:prstGeom prst="rect">
-            <a:avLst/>
-          </a:prstGeom>
-          <a:noFill/>
-          <a:ln/>
-        </p:spPr>
-        <p:txBody>
-          <a:bodyPr wrap="square" lIns="0" tIns="0" rIns="0" bIns="0" rtlCol="0" anchor="ctr"/>
-          <a:lstStyle/>
-          <a:p>
-            <a:pPr marL="0" indent="0">
-              <a:buNone/>
-            </a:pPr>
-            <a:r>
-              <a:rPr lang="en-US" sz="850" b="1" dirty="0">
-                <a:solidFill>
-                  <a:srgbClr val="FFFFFF"/>
-                </a:solidFill>
-                <a:latin typeface="Aptos" pitchFamily="34" charset="0"/>
-                <a:ea typeface="Aptos" pitchFamily="34" charset="-122"/>
-                <a:cs typeface="Aptos" pitchFamily="34" charset="-120"/>
-              </a:rPr>
-              <a:t>05 · Output examples</a:t>
-            </a:r>
-            <a:endParaRPr lang="en-US" sz="850" dirty="0"/>
-          </a:p>
-        </p:txBody>
-      </p:sp>
-      <p:sp>
-        <p:nvSpPr>
-          <p:cNvPr id="4" name="Text 2"/>
-          <p:cNvSpPr/>
-          <p:nvPr/>
-        </p:nvSpPr>
-        <p:spPr>
-          <a:xfrm>
-            <a:off x="11384280" y="73152"/>
-            <a:ext cx="411480" cy="201168"/>
-          </a:xfrm>
-          <a:prstGeom prst="rect">
-            <a:avLst/>
-          </a:prstGeom>
-          <a:noFill/>
-          <a:ln/>
-        </p:spPr>
-        <p:txBody>
-          <a:bodyPr wrap="square" lIns="0" tIns="0" rIns="0" bIns="0" rtlCol="0" anchor="ctr"/>
-          <a:lstStyle/>
-          <a:p>
-            <a:pPr marL="0" indent="0" algn="r">
-              <a:buNone/>
-            </a:pPr>
-            <a:r>
-              <a:rPr lang="en-US" sz="850" dirty="0">
-                <a:solidFill>
-                  <a:srgbClr val="A5F3FC"/>
-                </a:solidFill>
-              </a:rPr>
-              <a:t>24</a:t>
-            </a:r>
-            <a:endParaRPr lang="en-US" sz="850" dirty="0"/>
-          </a:p>
-        </p:txBody>
-      </p:sp>
-      <p:sp>
-        <p:nvSpPr>
-          <p:cNvPr id="5" name="Text 3"/>
-          <p:cNvSpPr/>
-          <p:nvPr/>
-        </p:nvSpPr>
-        <p:spPr>
-          <a:xfrm>
-            <a:off x="411480" y="6528816"/>
-            <a:ext cx="7863840" cy="164592"/>
-          </a:xfrm>
-          <a:prstGeom prst="rect">
-            <a:avLst/>
-          </a:prstGeom>
-          <a:noFill/>
-          <a:ln/>
-        </p:spPr>
-        <p:txBody>
-          <a:bodyPr wrap="square" lIns="0" tIns="0" rIns="0" bIns="0" rtlCol="0" anchor="ctr"/>
-          <a:lstStyle/>
-          <a:p>
-            <a:pPr marL="0" indent="0">
-              <a:buNone/>
-            </a:pPr>
-            <a:r>
-              <a:rPr lang="en-US" sz="750" dirty="0">
-                <a:solidFill>
-                  <a:srgbClr val="64748B"/>
-                </a:solidFill>
-              </a:rPr>
-              <a:t>Pipeline 2.0 · Script 01–05 · Diagrammi elettrici Object Detection</a:t>
-            </a:r>
-            <a:endParaRPr lang="en-US" sz="750" dirty="0"/>
-          </a:p>
-        </p:txBody>
-      </p:sp>
-      <p:sp>
-        <p:nvSpPr>
-          <p:cNvPr id="6" name="Text 4"/>
-          <p:cNvSpPr/>
-          <p:nvPr/>
-        </p:nvSpPr>
-        <p:spPr>
-          <a:xfrm>
-            <a:off x="9738360" y="6528816"/>
-            <a:ext cx="2057400" cy="164592"/>
-          </a:xfrm>
-          <a:prstGeom prst="rect">
-            <a:avLst/>
-          </a:prstGeom>
-          <a:noFill/>
-          <a:ln/>
-        </p:spPr>
-        <p:txBody>
-          <a:bodyPr wrap="square" lIns="0" tIns="0" rIns="0" bIns="0" rtlCol="0" anchor="ctr"/>
-          <a:lstStyle/>
-          <a:p>
-            <a:pPr marL="0" indent="0" algn="r">
-              <a:buNone/>
-            </a:pPr>
-            <a:r>
-              <a:rPr lang="en-US" sz="750" dirty="0">
-                <a:solidFill>
-                  <a:srgbClr val="64748B"/>
-                </a:solidFill>
-              </a:rPr>
-              <a:t>tesi / working deck</a:t>
-            </a:r>
-            <a:endParaRPr lang="en-US" sz="750" dirty="0"/>
-          </a:p>
-        </p:txBody>
-      </p:sp>
-      <p:sp>
-        <p:nvSpPr>
-          <p:cNvPr id="7" name="Text 5"/>
-          <p:cNvSpPr/>
-          <p:nvPr/>
-        </p:nvSpPr>
-        <p:spPr>
-          <a:xfrm>
-            <a:off x="502920" y="566928"/>
-            <a:ext cx="10698480" cy="411480"/>
-          </a:xfrm>
-          <a:prstGeom prst="rect">
-            <a:avLst/>
-          </a:prstGeom>
-          <a:noFill/>
-          <a:ln/>
-        </p:spPr>
-        <p:txBody>
-          <a:bodyPr wrap="square" lIns="0" tIns="0" rIns="0" bIns="0" rtlCol="0" anchor="ctr">
-            <a:normAutofit fontScale="92500" lnSpcReduction="10000"/>
-          </a:bodyPr>
-          <a:lstStyle/>
-          <a:p>
-            <a:pPr marL="0" indent="0">
-              <a:buNone/>
-            </a:pPr>
-            <a:r>
-              <a:rPr lang="en-US" sz="3000" b="1" dirty="0">
-                <a:solidFill>
-                  <a:srgbClr val="111827"/>
-                </a:solidFill>
-                <a:latin typeface="Aptos Display" pitchFamily="34" charset="0"/>
-                <a:ea typeface="Aptos Display" pitchFamily="34" charset="-122"/>
-                <a:cs typeface="Aptos Display" pitchFamily="34" charset="-120"/>
-              </a:rPr>
-              <a:t>Esempio più complesso: transformer, induttore e condensatori</a:t>
-            </a:r>
-            <a:endParaRPr lang="en-US" sz="3000" dirty="0"/>
-          </a:p>
-        </p:txBody>
-      </p:sp>
-      <p:sp>
-        <p:nvSpPr>
-          <p:cNvPr id="8" name="Text 6"/>
-          <p:cNvSpPr/>
-          <p:nvPr/>
-        </p:nvSpPr>
-        <p:spPr>
-          <a:xfrm>
-            <a:off x="530352" y="1042416"/>
-            <a:ext cx="10698480" cy="182880"/>
-          </a:xfrm>
-          <a:prstGeom prst="rect">
-            <a:avLst/>
-          </a:prstGeom>
-          <a:noFill/>
-          <a:ln/>
-        </p:spPr>
-        <p:txBody>
-          <a:bodyPr wrap="square" lIns="0" tIns="0" rIns="0" bIns="0" rtlCol="0" anchor="ctr">
-            <a:normAutofit fontScale="92500" lnSpcReduction="10000"/>
-          </a:bodyPr>
-          <a:lstStyle/>
-          <a:p>
-            <a:pPr marL="0" indent="0">
-              <a:buNone/>
-            </a:pPr>
-            <a:r>
-              <a:rPr lang="en-US" sz="1400" dirty="0">
-                <a:solidFill>
-                  <a:srgbClr val="334155"/>
-                </a:solidFill>
-              </a:rPr>
-              <a:t>La struttura resta la stessa anche quando aumentano componenti e nodi.</a:t>
-            </a:r>
-            <a:endParaRPr lang="en-US" sz="1400" dirty="0"/>
-          </a:p>
-        </p:txBody>
-      </p:sp>
-      <p:sp>
-        <p:nvSpPr>
-          <p:cNvPr id="9" name="Shape 7"/>
-          <p:cNvSpPr/>
-          <p:nvPr/>
-        </p:nvSpPr>
-        <p:spPr>
-          <a:xfrm>
-            <a:off x="621792" y="1216152"/>
-            <a:ext cx="4791456" cy="4791456"/>
-          </a:xfrm>
-          <a:prstGeom prst="roundRect">
-            <a:avLst>
-              <a:gd name="adj" fmla="val 1336"/>
-            </a:avLst>
-          </a:prstGeom>
-          <a:solidFill>
-            <a:srgbClr val="FFFFFF"/>
-          </a:solidFill>
-          <a:ln w="12700">
-            <a:solidFill>
-              <a:srgbClr val="CBD5E1">
-                <a:alpha val="80000"/>
-              </a:srgbClr>
-            </a:solidFill>
-            <a:prstDash val="solid"/>
-          </a:ln>
-          <a:effectLst>
-            <a:outerShdw blurRad="25400" dist="12700" dir="2700000" algn="bl" rotWithShape="0">
-              <a:srgbClr val="000000">
-                <a:alpha val="12000"/>
-              </a:srgbClr>
-            </a:outerShdw>
-          </a:effectLst>
-        </p:spPr>
-        <p:txBody>
-          <a:bodyPr/>
-          <a:lstStyle/>
-          <a:p>
-            <a:endParaRPr lang="it-IT"/>
-          </a:p>
-        </p:txBody>
-      </p:sp>
-      <p:pic>
-        <p:nvPicPr>
-          <p:cNvPr id="10" name="Image 0" descr="/mnt/data/8_terminal_overlay.jpg"/>
-          <p:cNvPicPr>
-            <a:picLocks noChangeAspect="1"/>
-          </p:cNvPicPr>
-          <p:nvPr/>
-        </p:nvPicPr>
-        <p:blipFill>
-          <a:blip r:embed="rId3"/>
-          <a:stretch>
-            <a:fillRect/>
-          </a:stretch>
-        </p:blipFill>
-        <p:spPr>
-          <a:xfrm>
-            <a:off x="640080" y="1234440"/>
-            <a:ext cx="4754880" cy="4754880"/>
-          </a:xfrm>
-          <a:prstGeom prst="rect">
-            <a:avLst/>
-          </a:prstGeom>
-        </p:spPr>
-      </p:pic>
-      <p:sp>
-        <p:nvSpPr>
-          <p:cNvPr id="11" name="Text 8"/>
-          <p:cNvSpPr/>
-          <p:nvPr/>
-        </p:nvSpPr>
-        <p:spPr>
-          <a:xfrm>
-            <a:off x="640080" y="6053328"/>
-            <a:ext cx="4754880" cy="201168"/>
-          </a:xfrm>
-          <a:prstGeom prst="rect">
-            <a:avLst/>
-          </a:prstGeom>
-          <a:noFill/>
-          <a:ln/>
-        </p:spPr>
-        <p:txBody>
-          <a:bodyPr wrap="square" lIns="0" tIns="0" rIns="0" bIns="0" rtlCol="0" anchor="ctr">
-            <a:normAutofit/>
-          </a:bodyPr>
-          <a:lstStyle/>
-          <a:p>
-            <a:pPr marL="0" indent="0" algn="ctr">
-              <a:buNone/>
-            </a:pPr>
-            <a:r>
-              <a:rPr lang="en-US" sz="820" dirty="0">
-                <a:solidFill>
-                  <a:srgbClr val="64748B"/>
-                </a:solidFill>
-              </a:rPr>
-              <a:t>Terminal overlay — caso 8</a:t>
-            </a:r>
-            <a:endParaRPr lang="en-US" sz="820" dirty="0"/>
-          </a:p>
-        </p:txBody>
-      </p:sp>
-      <p:sp>
-        <p:nvSpPr>
-          <p:cNvPr id="12" name="Shape 9"/>
-          <p:cNvSpPr/>
-          <p:nvPr/>
-        </p:nvSpPr>
-        <p:spPr>
-          <a:xfrm>
-            <a:off x="5715000" y="1325880"/>
-            <a:ext cx="5440680" cy="1645920"/>
-          </a:xfrm>
-          <a:prstGeom prst="roundRect">
-            <a:avLst>
-              <a:gd name="adj" fmla="val 2778"/>
-            </a:avLst>
-          </a:prstGeom>
-          <a:solidFill>
-            <a:srgbClr val="0F172A"/>
-          </a:solidFill>
-          <a:ln w="12700">
-            <a:solidFill>
-              <a:srgbClr val="1E293B"/>
-            </a:solidFill>
-            <a:prstDash val="solid"/>
-          </a:ln>
-        </p:spPr>
-        <p:txBody>
-          <a:bodyPr/>
-          <a:lstStyle/>
-          <a:p>
-            <a:endParaRPr lang="it-IT"/>
-          </a:p>
-        </p:txBody>
-      </p:sp>
-      <p:sp>
-        <p:nvSpPr>
-          <p:cNvPr id="13" name="Text 10"/>
-          <p:cNvSpPr/>
-          <p:nvPr/>
-        </p:nvSpPr>
-        <p:spPr>
-          <a:xfrm>
-            <a:off x="5861304" y="1463040"/>
-            <a:ext cx="5148072" cy="1421892"/>
-          </a:xfrm>
-          <a:prstGeom prst="rect">
-            <a:avLst/>
-          </a:prstGeom>
-          <a:noFill/>
-          <a:ln/>
-        </p:spPr>
-        <p:txBody>
-          <a:bodyPr wrap="square" lIns="0" tIns="0" rIns="0" bIns="0" rtlCol="0" anchor="ctr">
-            <a:normAutofit/>
-          </a:bodyPr>
-          <a:lstStyle/>
-          <a:p>
-            <a:pPr marL="0" indent="0">
-              <a:buNone/>
-            </a:pPr>
-            <a:r>
-              <a:rPr lang="en-US" sz="1200" dirty="0">
-                <a:solidFill>
-                  <a:srgbClr val="E2E8F0"/>
-                </a:solidFill>
-                <a:latin typeface="Consolas" pitchFamily="34" charset="0"/>
-                <a:ea typeface="Consolas" pitchFamily="34" charset="-122"/>
-                <a:cs typeface="Consolas" pitchFamily="34" charset="-120"/>
-              </a:rPr>
-              <a:t>"gnd9.1_t1": [</a:t>
-            </a:r>
-            <a:endParaRPr lang="en-US" sz="1200" dirty="0"/>
-          </a:p>
-          <a:p>
-            <a:pPr marL="0" indent="0">
-              <a:buNone/>
-            </a:pPr>
-            <a:r>
-              <a:rPr lang="en-US" sz="1200" dirty="0">
-                <a:solidFill>
-                  <a:srgbClr val="E2E8F0"/>
-                </a:solidFill>
-                <a:latin typeface="Consolas" pitchFamily="34" charset="0"/>
-                <a:ea typeface="Consolas" pitchFamily="34" charset="-122"/>
-                <a:cs typeface="Consolas" pitchFamily="34" charset="-120"/>
-              </a:rPr>
-              <a:t>  "polarized_capacitor20.2_negative",</a:t>
-            </a:r>
-            <a:endParaRPr lang="en-US" sz="1200" dirty="0"/>
-          </a:p>
-          <a:p>
-            <a:pPr marL="0" indent="0">
-              <a:buNone/>
-            </a:pPr>
-            <a:r>
-              <a:rPr lang="en-US" sz="1200" dirty="0">
-                <a:solidFill>
-                  <a:srgbClr val="E2E8F0"/>
-                </a:solidFill>
-                <a:latin typeface="Consolas" pitchFamily="34" charset="0"/>
-                <a:ea typeface="Consolas" pitchFamily="34" charset="-122"/>
-                <a:cs typeface="Consolas" pitchFamily="34" charset="-120"/>
-              </a:rPr>
-              <a:t>  "terminal26.1_t1",</a:t>
-            </a:r>
-            <a:endParaRPr lang="en-US" sz="1200" dirty="0"/>
-          </a:p>
-          <a:p>
-            <a:pPr marL="0" indent="0">
-              <a:buNone/>
-            </a:pPr>
-            <a:r>
-              <a:rPr lang="en-US" sz="1200" dirty="0">
-                <a:solidFill>
-                  <a:srgbClr val="E2E8F0"/>
-                </a:solidFill>
-                <a:latin typeface="Consolas" pitchFamily="34" charset="0"/>
-                <a:ea typeface="Consolas" pitchFamily="34" charset="-122"/>
-                <a:cs typeface="Consolas" pitchFamily="34" charset="-120"/>
-              </a:rPr>
-              <a:t>  "transformer28.1_t3"</a:t>
-            </a:r>
-            <a:endParaRPr lang="en-US" sz="1200" dirty="0"/>
-          </a:p>
-          <a:p>
-            <a:pPr marL="0" indent="0">
-              <a:buNone/>
-            </a:pPr>
-            <a:r>
-              <a:rPr lang="en-US" sz="1200" dirty="0">
-                <a:solidFill>
-                  <a:srgbClr val="E2E8F0"/>
-                </a:solidFill>
-                <a:latin typeface="Consolas" pitchFamily="34" charset="0"/>
-                <a:ea typeface="Consolas" pitchFamily="34" charset="-122"/>
-                <a:cs typeface="Consolas" pitchFamily="34" charset="-120"/>
-              </a:rPr>
-              <a:t>],</a:t>
-            </a:r>
-            <a:endParaRPr lang="en-US" sz="1200" dirty="0"/>
-          </a:p>
-          <a:p>
-            <a:pPr marL="0" indent="0">
-              <a:buNone/>
-            </a:pPr>
-            <a:r>
-              <a:rPr lang="en-US" sz="1200" dirty="0">
-                <a:solidFill>
-                  <a:srgbClr val="E2E8F0"/>
-                </a:solidFill>
-                <a:latin typeface="Consolas" pitchFamily="34" charset="0"/>
-                <a:ea typeface="Consolas" pitchFamily="34" charset="-122"/>
-                <a:cs typeface="Consolas" pitchFamily="34" charset="-120"/>
-              </a:rPr>
-              <a:t>"inductor10.1_t2": ["transformer28.1_t1"],</a:t>
-            </a:r>
-            <a:endParaRPr lang="en-US" sz="1200" dirty="0"/>
-          </a:p>
-          <a:p>
-            <a:pPr marL="0" indent="0">
-              <a:buNone/>
-            </a:pPr>
-            <a:r>
-              <a:rPr lang="en-US" sz="1200" dirty="0">
-                <a:solidFill>
-                  <a:srgbClr val="E2E8F0"/>
-                </a:solidFill>
-                <a:latin typeface="Consolas" pitchFamily="34" charset="0"/>
-                <a:ea typeface="Consolas" pitchFamily="34" charset="-122"/>
-                <a:cs typeface="Consolas" pitchFamily="34" charset="-120"/>
-              </a:rPr>
-              <a:t>"terminal26.4_t1": ["transformer28.1_t4"]</a:t>
-            </a:r>
-            <a:endParaRPr lang="en-US" sz="1200" dirty="0"/>
-          </a:p>
-        </p:txBody>
-      </p:sp>
-      <p:sp>
-        <p:nvSpPr>
-          <p:cNvPr id="14" name="Shape 11"/>
-          <p:cNvSpPr/>
-          <p:nvPr/>
-        </p:nvSpPr>
-        <p:spPr>
-          <a:xfrm>
-            <a:off x="5806440" y="3410712"/>
-            <a:ext cx="100584" cy="100584"/>
-          </a:xfrm>
-          <a:prstGeom prst="ellipse">
-            <a:avLst/>
-          </a:prstGeom>
-          <a:solidFill>
-            <a:srgbClr val="F97373"/>
-          </a:solidFill>
-          <a:ln w="12700">
-            <a:solidFill>
-              <a:srgbClr val="F97373"/>
-            </a:solidFill>
-            <a:prstDash val="solid"/>
-          </a:ln>
-        </p:spPr>
-        <p:txBody>
-          <a:bodyPr/>
-          <a:lstStyle/>
-          <a:p>
-            <a:endParaRPr lang="it-IT"/>
-          </a:p>
-        </p:txBody>
-      </p:sp>
-      <p:sp>
-        <p:nvSpPr>
-          <p:cNvPr id="15" name="Text 12"/>
-          <p:cNvSpPr/>
-          <p:nvPr/>
-        </p:nvSpPr>
-        <p:spPr>
-          <a:xfrm>
-            <a:off x="6035040" y="3337560"/>
-            <a:ext cx="4800600" cy="320040"/>
-          </a:xfrm>
-          <a:prstGeom prst="rect">
-            <a:avLst/>
-          </a:prstGeom>
-          <a:noFill/>
-          <a:ln/>
-        </p:spPr>
-        <p:txBody>
-          <a:bodyPr wrap="square" lIns="127" tIns="127" rIns="127" bIns="127" rtlCol="0" anchor="ctr">
-            <a:normAutofit fontScale="92500" lnSpcReduction="10000"/>
-          </a:bodyPr>
-          <a:lstStyle/>
-          <a:p>
-            <a:pPr marL="0" indent="0">
-              <a:buNone/>
-            </a:pPr>
-            <a:r>
-              <a:rPr lang="en-US" sz="1240" dirty="0">
-                <a:solidFill>
-                  <a:srgbClr val="111827"/>
-                </a:solidFill>
-              </a:rPr>
-              <a:t>Il transformer non viene cortocircuitato internamente: i suoi terminali sono trattati come punti indipendenti.</a:t>
-            </a:r>
-            <a:endParaRPr lang="en-US" sz="1240" dirty="0"/>
-          </a:p>
-        </p:txBody>
-      </p:sp>
-      <p:sp>
-        <p:nvSpPr>
-          <p:cNvPr id="16" name="Shape 13"/>
-          <p:cNvSpPr/>
-          <p:nvPr/>
-        </p:nvSpPr>
-        <p:spPr>
-          <a:xfrm>
-            <a:off x="5806440" y="3822192"/>
-            <a:ext cx="100584" cy="100584"/>
-          </a:xfrm>
-          <a:prstGeom prst="ellipse">
-            <a:avLst/>
-          </a:prstGeom>
-          <a:solidFill>
-            <a:srgbClr val="F97373"/>
-          </a:solidFill>
-          <a:ln w="12700">
-            <a:solidFill>
-              <a:srgbClr val="F97373"/>
-            </a:solidFill>
-            <a:prstDash val="solid"/>
-          </a:ln>
-        </p:spPr>
-        <p:txBody>
-          <a:bodyPr/>
-          <a:lstStyle/>
-          <a:p>
-            <a:endParaRPr lang="it-IT"/>
-          </a:p>
-        </p:txBody>
-      </p:sp>
-      <p:sp>
-        <p:nvSpPr>
-          <p:cNvPr id="17" name="Text 14"/>
-          <p:cNvSpPr/>
-          <p:nvPr/>
-        </p:nvSpPr>
-        <p:spPr>
-          <a:xfrm>
-            <a:off x="6035040" y="3749040"/>
-            <a:ext cx="4800600" cy="320040"/>
-          </a:xfrm>
-          <a:prstGeom prst="rect">
-            <a:avLst/>
-          </a:prstGeom>
-          <a:noFill/>
-          <a:ln/>
-        </p:spPr>
-        <p:txBody>
-          <a:bodyPr wrap="square" lIns="127" tIns="127" rIns="127" bIns="127" rtlCol="0" anchor="ctr">
-            <a:normAutofit fontScale="92500" lnSpcReduction="10000"/>
-          </a:bodyPr>
-          <a:lstStyle/>
-          <a:p>
-            <a:pPr marL="0" indent="0">
-              <a:buNone/>
-            </a:pPr>
-            <a:r>
-              <a:rPr lang="en-US" sz="1240" dirty="0">
-                <a:solidFill>
-                  <a:srgbClr val="111827"/>
-                </a:solidFill>
-              </a:rPr>
-              <a:t>Il grafo conserva i collegamenti tra induttore, condensatori, terminali esterni e GND.</a:t>
-            </a:r>
-            <a:endParaRPr lang="en-US" sz="1240" dirty="0"/>
-          </a:p>
-        </p:txBody>
-      </p:sp>
-      <p:sp>
-        <p:nvSpPr>
-          <p:cNvPr id="18" name="Shape 15"/>
-          <p:cNvSpPr/>
-          <p:nvPr/>
-        </p:nvSpPr>
-        <p:spPr>
-          <a:xfrm>
-            <a:off x="5806440" y="4233672"/>
-            <a:ext cx="100584" cy="100584"/>
-          </a:xfrm>
-          <a:prstGeom prst="ellipse">
-            <a:avLst/>
-          </a:prstGeom>
-          <a:solidFill>
-            <a:srgbClr val="F97373"/>
-          </a:solidFill>
-          <a:ln w="12700">
-            <a:solidFill>
-              <a:srgbClr val="F97373"/>
-            </a:solidFill>
-            <a:prstDash val="solid"/>
-          </a:ln>
-        </p:spPr>
-        <p:txBody>
-          <a:bodyPr/>
-          <a:lstStyle/>
-          <a:p>
-            <a:endParaRPr lang="it-IT"/>
-          </a:p>
-        </p:txBody>
-      </p:sp>
-      <p:sp>
-        <p:nvSpPr>
-          <p:cNvPr id="19" name="Text 16"/>
-          <p:cNvSpPr/>
-          <p:nvPr/>
-        </p:nvSpPr>
-        <p:spPr>
-          <a:xfrm>
-            <a:off x="6035040" y="4160520"/>
-            <a:ext cx="4800600" cy="320040"/>
-          </a:xfrm>
-          <a:prstGeom prst="rect">
-            <a:avLst/>
-          </a:prstGeom>
-          <a:noFill/>
-          <a:ln/>
-        </p:spPr>
-        <p:txBody>
-          <a:bodyPr wrap="square" lIns="127" tIns="127" rIns="127" bIns="127" rtlCol="0" anchor="ctr">
-            <a:normAutofit fontScale="92500" lnSpcReduction="10000"/>
-          </a:bodyPr>
-          <a:lstStyle/>
-          <a:p>
-            <a:pPr marL="0" indent="0">
-              <a:buNone/>
-            </a:pPr>
-            <a:r>
-              <a:rPr lang="en-US" sz="1240" dirty="0">
-                <a:solidFill>
-                  <a:srgbClr val="111827"/>
-                </a:solidFill>
-              </a:rPr>
-              <a:t>Per visualizzare meglio questi gruppi, il prossimo passo 06 potrà derivare ConnectionGroup dal graph del 05.</a:t>
-            </a:r>
-            <a:endParaRPr lang="en-US" sz="1240" dirty="0"/>
-          </a:p>
-        </p:txBody>
-      </p:sp>
-    </p:spTree>
-  </p:cSld>
-  <p:clrMapOvr>
-    <a:masterClrMapping/>
-  </p:clrMapOvr>
-</p:sld>
-</file>
-
-<file path=ppt/slides/slide25.xml><?xml version="1.0" encoding="utf-8"?>
+<file path=ppt/slides/slide23.xml><?xml version="1.0" encoding="utf-8"?>
 <p:sld xmlns:a="http://schemas.openxmlformats.org/drawingml/2006/main" xmlns:r="http://schemas.openxmlformats.org/officeDocument/2006/relationships" xmlns:p="http://schemas.openxmlformats.org/presentationml/2006/main">
   <p:cSld name="Slide 25">
     <p:bg>
@@ -18858,7 +16894,7 @@
 </p:sld>
 </file>
 
-<file path=ppt/slides/slide26.xml><?xml version="1.0" encoding="utf-8"?>
+<file path=ppt/slides/slide24.xml><?xml version="1.0" encoding="utf-8"?>
 <p:sld xmlns:a="http://schemas.openxmlformats.org/drawingml/2006/main" xmlns:r="http://schemas.openxmlformats.org/officeDocument/2006/relationships" xmlns:p="http://schemas.openxmlformats.org/presentationml/2006/main">
   <p:cSld name="Slide 26">
     <p:bg>
@@ -19813,7 +17849,7 @@
 </p:sld>
 </file>
 
-<file path=ppt/slides/slide27.xml><?xml version="1.0" encoding="utf-8"?>
+<file path=ppt/slides/slide25.xml><?xml version="1.0" encoding="utf-8"?>
 <p:sld xmlns:a="http://schemas.openxmlformats.org/drawingml/2006/main" xmlns:r="http://schemas.openxmlformats.org/officeDocument/2006/relationships" xmlns:p="http://schemas.openxmlformats.org/presentationml/2006/main">
   <p:cSld name="Slide 27">
     <p:bg>
@@ -21021,7 +19057,7 @@
 </p:sld>
 </file>
 
-<file path=ppt/slides/slide28.xml><?xml version="1.0" encoding="utf-8"?>
+<file path=ppt/slides/slide26.xml><?xml version="1.0" encoding="utf-8"?>
 <p:sld xmlns:a="http://schemas.openxmlformats.org/drawingml/2006/main" xmlns:r="http://schemas.openxmlformats.org/officeDocument/2006/relationships" xmlns:p="http://schemas.openxmlformats.org/presentationml/2006/main">
   <p:cSld name="Slide 28">
     <p:bg>
@@ -22149,7 +20185,7 @@
 </p:sld>
 </file>
 
-<file path=ppt/slides/slide29.xml><?xml version="1.0" encoding="utf-8"?>
+<file path=ppt/slides/slide27.xml><?xml version="1.0" encoding="utf-8"?>
 <p:sld xmlns:a="http://schemas.openxmlformats.org/drawingml/2006/main" xmlns:r="http://schemas.openxmlformats.org/officeDocument/2006/relationships" xmlns:p="http://schemas.openxmlformats.org/presentationml/2006/main">
   <p:cSld name="Slide 29">
     <p:bg>
@@ -23076,6 +21112,632 @@
               <a:t>Esempio base per test 06</a:t>
             </a:r>
             <a:endParaRPr lang="en-US" sz="820" dirty="0"/>
+          </a:p>
+        </p:txBody>
+      </p:sp>
+    </p:spTree>
+  </p:cSld>
+  <p:clrMapOvr>
+    <a:masterClrMapping/>
+  </p:clrMapOvr>
+</p:sld>
+</file>
+
+<file path=ppt/slides/slide28.xml><?xml version="1.0" encoding="utf-8"?>
+<p:sld xmlns:a="http://schemas.openxmlformats.org/drawingml/2006/main" xmlns:r="http://schemas.openxmlformats.org/officeDocument/2006/relationships" xmlns:p="http://schemas.openxmlformats.org/presentationml/2006/main">
+  <p:cSld name="Slide 30">
+    <p:bg>
+      <p:bgPr>
+        <a:solidFill>
+          <a:srgbClr val="0B1020"/>
+        </a:solidFill>
+        <a:effectLst/>
+      </p:bgPr>
+    </p:bg>
+    <p:spTree>
+      <p:nvGrpSpPr>
+        <p:cNvPr id="1" name=""/>
+        <p:cNvGrpSpPr/>
+        <p:nvPr/>
+      </p:nvGrpSpPr>
+      <p:grpSpPr>
+        <a:xfrm>
+          <a:off x="0" y="0"/>
+          <a:ext cx="0" cy="0"/>
+          <a:chOff x="0" y="0"/>
+          <a:chExt cx="0" cy="0"/>
+        </a:xfrm>
+      </p:grpSpPr>
+      <p:pic>
+        <p:nvPicPr>
+          <p:cNvPr id="2" name="Image 0" descr="/mnt/data/1_skeleton_overlay.jpg"/>
+          <p:cNvPicPr>
+            <a:picLocks noChangeAspect="1"/>
+          </p:cNvPicPr>
+          <p:nvPr/>
+        </p:nvPicPr>
+        <p:blipFill>
+          <a:blip r:embed="rId3"/>
+          <a:srcRect l="7780" r="7780"/>
+          <a:stretch/>
+        </p:blipFill>
+        <p:spPr>
+          <a:xfrm>
+            <a:off x="6400800" y="0"/>
+            <a:ext cx="5790895" cy="6858000"/>
+          </a:xfrm>
+          <a:prstGeom prst="rect">
+            <a:avLst/>
+          </a:prstGeom>
+        </p:spPr>
+      </p:pic>
+      <p:sp>
+        <p:nvSpPr>
+          <p:cNvPr id="3" name="Shape 0"/>
+          <p:cNvSpPr/>
+          <p:nvPr/>
+        </p:nvSpPr>
+        <p:spPr>
+          <a:xfrm>
+            <a:off x="6400800" y="0"/>
+            <a:ext cx="5790895" cy="6858000"/>
+          </a:xfrm>
+          <a:prstGeom prst="rect">
+            <a:avLst/>
+          </a:prstGeom>
+          <a:solidFill>
+            <a:srgbClr val="0B1020">
+              <a:alpha val="70000"/>
+            </a:srgbClr>
+          </a:solidFill>
+          <a:ln w="12700">
+            <a:solidFill>
+              <a:srgbClr val="0B1020">
+                <a:alpha val="0"/>
+              </a:srgbClr>
+            </a:solidFill>
+            <a:prstDash val="solid"/>
+          </a:ln>
+        </p:spPr>
+        <p:txBody>
+          <a:bodyPr/>
+          <a:lstStyle/>
+          <a:p>
+            <a:endParaRPr lang="it-IT"/>
+          </a:p>
+        </p:txBody>
+      </p:sp>
+      <p:sp>
+        <p:nvSpPr>
+          <p:cNvPr id="4" name="Text 1"/>
+          <p:cNvSpPr/>
+          <p:nvPr/>
+        </p:nvSpPr>
+        <p:spPr>
+          <a:xfrm>
+            <a:off x="640080" y="777240"/>
+            <a:ext cx="3840480" cy="320040"/>
+          </a:xfrm>
+          <a:prstGeom prst="rect">
+            <a:avLst/>
+          </a:prstGeom>
+          <a:noFill/>
+          <a:ln/>
+        </p:spPr>
+        <p:txBody>
+          <a:bodyPr wrap="square" lIns="0" tIns="0" rIns="0" bIns="0" rtlCol="0" anchor="ctr"/>
+          <a:lstStyle/>
+          <a:p>
+            <a:pPr marL="0" indent="0">
+              <a:buNone/>
+            </a:pPr>
+            <a:r>
+              <a:rPr lang="en-US" sz="1500" b="1" dirty="0">
+                <a:solidFill>
+                  <a:srgbClr val="67E8F9"/>
+                </a:solidFill>
+              </a:rPr>
+              <a:t>Sintesi finale</a:t>
+            </a:r>
+            <a:endParaRPr lang="en-US" sz="1500" dirty="0"/>
+          </a:p>
+        </p:txBody>
+      </p:sp>
+      <p:sp>
+        <p:nvSpPr>
+          <p:cNvPr id="5" name="Text 2"/>
+          <p:cNvSpPr/>
+          <p:nvPr/>
+        </p:nvSpPr>
+        <p:spPr>
+          <a:xfrm>
+            <a:off x="640080" y="1234440"/>
+            <a:ext cx="5257800" cy="640080"/>
+          </a:xfrm>
+          <a:prstGeom prst="rect">
+            <a:avLst/>
+          </a:prstGeom>
+          <a:noFill/>
+          <a:ln/>
+        </p:spPr>
+        <p:txBody>
+          <a:bodyPr wrap="square" lIns="0" tIns="0" rIns="0" bIns="0" rtlCol="0" anchor="ctr">
+            <a:normAutofit fontScale="92500"/>
+          </a:bodyPr>
+          <a:lstStyle/>
+          <a:p>
+            <a:pPr marL="0" indent="0">
+              <a:buNone/>
+            </a:pPr>
+            <a:r>
+              <a:rPr lang="en-US" sz="3100" b="1" dirty="0">
+                <a:solidFill>
+                  <a:srgbClr val="FFFFFF"/>
+                </a:solidFill>
+              </a:rPr>
+              <a:t>Cosa abbiamo costruito finora</a:t>
+            </a:r>
+            <a:endParaRPr lang="en-US" sz="3100" dirty="0"/>
+          </a:p>
+        </p:txBody>
+      </p:sp>
+      <p:sp>
+        <p:nvSpPr>
+          <p:cNvPr id="6" name="Shape 3"/>
+          <p:cNvSpPr/>
+          <p:nvPr/>
+        </p:nvSpPr>
+        <p:spPr>
+          <a:xfrm>
+            <a:off x="777240" y="2404872"/>
+            <a:ext cx="100584" cy="100584"/>
+          </a:xfrm>
+          <a:prstGeom prst="ellipse">
+            <a:avLst/>
+          </a:prstGeom>
+          <a:solidFill>
+            <a:srgbClr val="67E8F9"/>
+          </a:solidFill>
+          <a:ln w="12700">
+            <a:solidFill>
+              <a:srgbClr val="67E8F9"/>
+            </a:solidFill>
+            <a:prstDash val="solid"/>
+          </a:ln>
+        </p:spPr>
+        <p:txBody>
+          <a:bodyPr/>
+          <a:lstStyle/>
+          <a:p>
+            <a:endParaRPr lang="it-IT"/>
+          </a:p>
+        </p:txBody>
+      </p:sp>
+      <p:sp>
+        <p:nvSpPr>
+          <p:cNvPr id="7" name="Text 4"/>
+          <p:cNvSpPr/>
+          <p:nvPr/>
+        </p:nvSpPr>
+        <p:spPr>
+          <a:xfrm>
+            <a:off x="1005840" y="2331720"/>
+            <a:ext cx="5029200" cy="320040"/>
+          </a:xfrm>
+          <a:prstGeom prst="rect">
+            <a:avLst/>
+          </a:prstGeom>
+          <a:noFill/>
+          <a:ln/>
+        </p:spPr>
+        <p:txBody>
+          <a:bodyPr wrap="square" lIns="127" tIns="127" rIns="127" bIns="127" rtlCol="0" anchor="ctr">
+            <a:normAutofit/>
+          </a:bodyPr>
+          <a:lstStyle/>
+          <a:p>
+            <a:pPr marL="0" indent="0">
+              <a:buNone/>
+            </a:pPr>
+            <a:r>
+              <a:rPr lang="en-US" sz="1420" dirty="0">
+                <a:solidFill>
+                  <a:srgbClr val="E2E8F0"/>
+                </a:solidFill>
+              </a:rPr>
+              <a:t>01 riconosce e corregge i componenti.</a:t>
+            </a:r>
+            <a:endParaRPr lang="en-US" sz="1420" dirty="0"/>
+          </a:p>
+        </p:txBody>
+      </p:sp>
+      <p:sp>
+        <p:nvSpPr>
+          <p:cNvPr id="8" name="Shape 5"/>
+          <p:cNvSpPr/>
+          <p:nvPr/>
+        </p:nvSpPr>
+        <p:spPr>
+          <a:xfrm>
+            <a:off x="777240" y="2816352"/>
+            <a:ext cx="100584" cy="100584"/>
+          </a:xfrm>
+          <a:prstGeom prst="ellipse">
+            <a:avLst/>
+          </a:prstGeom>
+          <a:solidFill>
+            <a:srgbClr val="67E8F9"/>
+          </a:solidFill>
+          <a:ln w="12700">
+            <a:solidFill>
+              <a:srgbClr val="67E8F9"/>
+            </a:solidFill>
+            <a:prstDash val="solid"/>
+          </a:ln>
+        </p:spPr>
+        <p:txBody>
+          <a:bodyPr/>
+          <a:lstStyle/>
+          <a:p>
+            <a:endParaRPr lang="it-IT"/>
+          </a:p>
+        </p:txBody>
+      </p:sp>
+      <p:sp>
+        <p:nvSpPr>
+          <p:cNvPr id="9" name="Text 6"/>
+          <p:cNvSpPr/>
+          <p:nvPr/>
+        </p:nvSpPr>
+        <p:spPr>
+          <a:xfrm>
+            <a:off x="1005840" y="2743200"/>
+            <a:ext cx="5029200" cy="320040"/>
+          </a:xfrm>
+          <a:prstGeom prst="rect">
+            <a:avLst/>
+          </a:prstGeom>
+          <a:noFill/>
+          <a:ln/>
+        </p:spPr>
+        <p:txBody>
+          <a:bodyPr wrap="square" lIns="127" tIns="127" rIns="127" bIns="127" rtlCol="0" anchor="ctr">
+            <a:normAutofit/>
+          </a:bodyPr>
+          <a:lstStyle/>
+          <a:p>
+            <a:pPr marL="0" indent="0">
+              <a:buNone/>
+            </a:pPr>
+            <a:r>
+              <a:rPr lang="en-US" sz="1420" dirty="0">
+                <a:solidFill>
+                  <a:srgbClr val="E2E8F0"/>
+                </a:solidFill>
+              </a:rPr>
+              <a:t>02 dà nomi stabili alle istanze.</a:t>
+            </a:r>
+            <a:endParaRPr lang="en-US" sz="1420" dirty="0"/>
+          </a:p>
+        </p:txBody>
+      </p:sp>
+      <p:sp>
+        <p:nvSpPr>
+          <p:cNvPr id="10" name="Shape 7"/>
+          <p:cNvSpPr/>
+          <p:nvPr/>
+        </p:nvSpPr>
+        <p:spPr>
+          <a:xfrm>
+            <a:off x="777240" y="3227832"/>
+            <a:ext cx="100584" cy="100584"/>
+          </a:xfrm>
+          <a:prstGeom prst="ellipse">
+            <a:avLst/>
+          </a:prstGeom>
+          <a:solidFill>
+            <a:srgbClr val="67E8F9"/>
+          </a:solidFill>
+          <a:ln w="12700">
+            <a:solidFill>
+              <a:srgbClr val="67E8F9"/>
+            </a:solidFill>
+            <a:prstDash val="solid"/>
+          </a:ln>
+        </p:spPr>
+        <p:txBody>
+          <a:bodyPr/>
+          <a:lstStyle/>
+          <a:p>
+            <a:endParaRPr lang="it-IT"/>
+          </a:p>
+        </p:txBody>
+      </p:sp>
+      <p:sp>
+        <p:nvSpPr>
+          <p:cNvPr id="11" name="Text 8"/>
+          <p:cNvSpPr/>
+          <p:nvPr/>
+        </p:nvSpPr>
+        <p:spPr>
+          <a:xfrm>
+            <a:off x="1005840" y="3154680"/>
+            <a:ext cx="5029200" cy="320040"/>
+          </a:xfrm>
+          <a:prstGeom prst="rect">
+            <a:avLst/>
+          </a:prstGeom>
+          <a:noFill/>
+          <a:ln/>
+        </p:spPr>
+        <p:txBody>
+          <a:bodyPr wrap="square" lIns="127" tIns="127" rIns="127" bIns="127" rtlCol="0" anchor="ctr">
+            <a:normAutofit/>
+          </a:bodyPr>
+          <a:lstStyle/>
+          <a:p>
+            <a:pPr marL="0" indent="0">
+              <a:buNone/>
+            </a:pPr>
+            <a:r>
+              <a:rPr lang="en-US" sz="1420" dirty="0">
+                <a:solidFill>
+                  <a:srgbClr val="E2E8F0"/>
+                </a:solidFill>
+              </a:rPr>
+              <a:t>03 trova terminali e semantica.</a:t>
+            </a:r>
+            <a:endParaRPr lang="en-US" sz="1420" dirty="0"/>
+          </a:p>
+        </p:txBody>
+      </p:sp>
+      <p:sp>
+        <p:nvSpPr>
+          <p:cNvPr id="12" name="Shape 9"/>
+          <p:cNvSpPr/>
+          <p:nvPr/>
+        </p:nvSpPr>
+        <p:spPr>
+          <a:xfrm>
+            <a:off x="777240" y="3639312"/>
+            <a:ext cx="100584" cy="100584"/>
+          </a:xfrm>
+          <a:prstGeom prst="ellipse">
+            <a:avLst/>
+          </a:prstGeom>
+          <a:solidFill>
+            <a:srgbClr val="67E8F9"/>
+          </a:solidFill>
+          <a:ln w="12700">
+            <a:solidFill>
+              <a:srgbClr val="67E8F9"/>
+            </a:solidFill>
+            <a:prstDash val="solid"/>
+          </a:ln>
+        </p:spPr>
+        <p:txBody>
+          <a:bodyPr/>
+          <a:lstStyle/>
+          <a:p>
+            <a:endParaRPr lang="it-IT"/>
+          </a:p>
+        </p:txBody>
+      </p:sp>
+      <p:sp>
+        <p:nvSpPr>
+          <p:cNvPr id="13" name="Text 10"/>
+          <p:cNvSpPr/>
+          <p:nvPr/>
+        </p:nvSpPr>
+        <p:spPr>
+          <a:xfrm>
+            <a:off x="1005840" y="3566160"/>
+            <a:ext cx="5029200" cy="320040"/>
+          </a:xfrm>
+          <a:prstGeom prst="rect">
+            <a:avLst/>
+          </a:prstGeom>
+          <a:noFill/>
+          <a:ln/>
+        </p:spPr>
+        <p:txBody>
+          <a:bodyPr wrap="square" lIns="127" tIns="127" rIns="127" bIns="127" rtlCol="0" anchor="ctr">
+            <a:normAutofit/>
+          </a:bodyPr>
+          <a:lstStyle/>
+          <a:p>
+            <a:pPr marL="0" indent="0">
+              <a:buNone/>
+            </a:pPr>
+            <a:r>
+              <a:rPr lang="en-US" sz="1420" dirty="0">
+                <a:solidFill>
+                  <a:srgbClr val="E2E8F0"/>
+                </a:solidFill>
+              </a:rPr>
+              <a:t>04 isola i wire come skeleton.</a:t>
+            </a:r>
+            <a:endParaRPr lang="en-US" sz="1420" dirty="0"/>
+          </a:p>
+        </p:txBody>
+      </p:sp>
+      <p:sp>
+        <p:nvSpPr>
+          <p:cNvPr id="14" name="Shape 11"/>
+          <p:cNvSpPr/>
+          <p:nvPr/>
+        </p:nvSpPr>
+        <p:spPr>
+          <a:xfrm>
+            <a:off x="777240" y="4050792"/>
+            <a:ext cx="100584" cy="100584"/>
+          </a:xfrm>
+          <a:prstGeom prst="ellipse">
+            <a:avLst/>
+          </a:prstGeom>
+          <a:solidFill>
+            <a:srgbClr val="67E8F9"/>
+          </a:solidFill>
+          <a:ln w="12700">
+            <a:solidFill>
+              <a:srgbClr val="67E8F9"/>
+            </a:solidFill>
+            <a:prstDash val="solid"/>
+          </a:ln>
+        </p:spPr>
+        <p:txBody>
+          <a:bodyPr/>
+          <a:lstStyle/>
+          <a:p>
+            <a:endParaRPr lang="it-IT"/>
+          </a:p>
+        </p:txBody>
+      </p:sp>
+      <p:sp>
+        <p:nvSpPr>
+          <p:cNvPr id="15" name="Text 12"/>
+          <p:cNvSpPr/>
+          <p:nvPr/>
+        </p:nvSpPr>
+        <p:spPr>
+          <a:xfrm>
+            <a:off x="1005840" y="3977640"/>
+            <a:ext cx="5029200" cy="320040"/>
+          </a:xfrm>
+          <a:prstGeom prst="rect">
+            <a:avLst/>
+          </a:prstGeom>
+          <a:noFill/>
+          <a:ln/>
+        </p:spPr>
+        <p:txBody>
+          <a:bodyPr wrap="square" lIns="127" tIns="127" rIns="127" bIns="127" rtlCol="0" anchor="ctr">
+            <a:normAutofit/>
+          </a:bodyPr>
+          <a:lstStyle/>
+          <a:p>
+            <a:pPr marL="0" indent="0">
+              <a:buNone/>
+            </a:pPr>
+            <a:r>
+              <a:rPr lang="en-US" sz="1420" dirty="0">
+                <a:solidFill>
+                  <a:srgbClr val="E2E8F0"/>
+                </a:solidFill>
+              </a:rPr>
+              <a:t>05 produce il JSON topologico minimale.</a:t>
+            </a:r>
+            <a:endParaRPr lang="en-US" sz="1420" dirty="0"/>
+          </a:p>
+        </p:txBody>
+      </p:sp>
+      <p:sp>
+        <p:nvSpPr>
+          <p:cNvPr id="16" name="Shape 13"/>
+          <p:cNvSpPr/>
+          <p:nvPr/>
+        </p:nvSpPr>
+        <p:spPr>
+          <a:xfrm>
+            <a:off x="777240" y="4937760"/>
+            <a:ext cx="5166360" cy="868680"/>
+          </a:xfrm>
+          <a:prstGeom prst="roundRect">
+            <a:avLst>
+              <a:gd name="adj" fmla="val 12632"/>
+            </a:avLst>
+          </a:prstGeom>
+          <a:solidFill>
+            <a:srgbClr val="111827">
+              <a:alpha val="95000"/>
+            </a:srgbClr>
+          </a:solidFill>
+          <a:ln w="12700">
+            <a:solidFill>
+              <a:srgbClr val="334155"/>
+            </a:solidFill>
+            <a:prstDash val="solid"/>
+          </a:ln>
+        </p:spPr>
+        <p:txBody>
+          <a:bodyPr/>
+          <a:lstStyle/>
+          <a:p>
+            <a:endParaRPr lang="it-IT"/>
+          </a:p>
+        </p:txBody>
+      </p:sp>
+      <p:sp>
+        <p:nvSpPr>
+          <p:cNvPr id="17" name="Text 14"/>
+          <p:cNvSpPr/>
+          <p:nvPr/>
+        </p:nvSpPr>
+        <p:spPr>
+          <a:xfrm>
+            <a:off x="1024128" y="5157216"/>
+            <a:ext cx="1645920" cy="164592"/>
+          </a:xfrm>
+          <a:prstGeom prst="rect">
+            <a:avLst/>
+          </a:prstGeom>
+          <a:noFill/>
+          <a:ln/>
+        </p:spPr>
+        <p:txBody>
+          <a:bodyPr wrap="square" lIns="0" tIns="0" rIns="0" bIns="0" rtlCol="0" anchor="ctr"/>
+          <a:lstStyle/>
+          <a:p>
+            <a:pPr marL="0" indent="0">
+              <a:buNone/>
+            </a:pPr>
+            <a:r>
+              <a:rPr lang="en-US" sz="1050" b="1" dirty="0">
+                <a:solidFill>
+                  <a:srgbClr val="A5F3FC"/>
+                </a:solidFill>
+              </a:rPr>
+              <a:t>Messaggio chiave</a:t>
+            </a:r>
+            <a:endParaRPr lang="en-US" sz="1050" dirty="0"/>
+          </a:p>
+        </p:txBody>
+      </p:sp>
+      <p:sp>
+        <p:nvSpPr>
+          <p:cNvPr id="18" name="Text 15"/>
+          <p:cNvSpPr/>
+          <p:nvPr/>
+        </p:nvSpPr>
+        <p:spPr>
+          <a:xfrm>
+            <a:off x="1024128" y="5413248"/>
+            <a:ext cx="4572000" cy="228600"/>
+          </a:xfrm>
+          <a:prstGeom prst="rect">
+            <a:avLst/>
+          </a:prstGeom>
+          <a:noFill/>
+          <a:ln/>
+        </p:spPr>
+        <p:txBody>
+          <a:bodyPr wrap="square" lIns="0" tIns="0" rIns="0" bIns="0" rtlCol="0" anchor="ctr">
+            <a:normAutofit fontScale="77500" lnSpcReduction="20000"/>
+          </a:bodyPr>
+          <a:lstStyle/>
+          <a:p>
+            <a:pPr marL="0" indent="0">
+              <a:buNone/>
+            </a:pPr>
+            <a:r>
+              <a:rPr lang="en-US" sz="1220" dirty="0">
+                <a:solidFill>
+                  <a:srgbClr val="FFFFFF"/>
+                </a:solidFill>
+              </a:rPr>
+              <a:t>Il JSON finale è il ponte tra visione artificiale e ragionamento AI: non è solo detection, ma una topologia interrogabile.</a:t>
+            </a:r>
+            <a:endParaRPr lang="en-US" sz="1220" dirty="0"/>
           </a:p>
         </p:txBody>
       </p:sp>
@@ -24730,632 +23392,6 @@
               <a:t>Il JSON finale elimina molta ambiguità visiva: l’AI non deve interpretare pixel, ma relazioni tra terminali e componenti.</a:t>
             </a:r>
             <a:endParaRPr lang="en-US" sz="1250" dirty="0"/>
-          </a:p>
-        </p:txBody>
-      </p:sp>
-    </p:spTree>
-  </p:cSld>
-  <p:clrMapOvr>
-    <a:masterClrMapping/>
-  </p:clrMapOvr>
-</p:sld>
-</file>
-
-<file path=ppt/slides/slide30.xml><?xml version="1.0" encoding="utf-8"?>
-<p:sld xmlns:a="http://schemas.openxmlformats.org/drawingml/2006/main" xmlns:r="http://schemas.openxmlformats.org/officeDocument/2006/relationships" xmlns:p="http://schemas.openxmlformats.org/presentationml/2006/main">
-  <p:cSld name="Slide 30">
-    <p:bg>
-      <p:bgPr>
-        <a:solidFill>
-          <a:srgbClr val="0B1020"/>
-        </a:solidFill>
-        <a:effectLst/>
-      </p:bgPr>
-    </p:bg>
-    <p:spTree>
-      <p:nvGrpSpPr>
-        <p:cNvPr id="1" name=""/>
-        <p:cNvGrpSpPr/>
-        <p:nvPr/>
-      </p:nvGrpSpPr>
-      <p:grpSpPr>
-        <a:xfrm>
-          <a:off x="0" y="0"/>
-          <a:ext cx="0" cy="0"/>
-          <a:chOff x="0" y="0"/>
-          <a:chExt cx="0" cy="0"/>
-        </a:xfrm>
-      </p:grpSpPr>
-      <p:pic>
-        <p:nvPicPr>
-          <p:cNvPr id="2" name="Image 0" descr="/mnt/data/1_skeleton_overlay.jpg"/>
-          <p:cNvPicPr>
-            <a:picLocks noChangeAspect="1"/>
-          </p:cNvPicPr>
-          <p:nvPr/>
-        </p:nvPicPr>
-        <p:blipFill>
-          <a:blip r:embed="rId3"/>
-          <a:srcRect l="7780" r="7780"/>
-          <a:stretch/>
-        </p:blipFill>
-        <p:spPr>
-          <a:xfrm>
-            <a:off x="6400800" y="0"/>
-            <a:ext cx="5790895" cy="6858000"/>
-          </a:xfrm>
-          <a:prstGeom prst="rect">
-            <a:avLst/>
-          </a:prstGeom>
-        </p:spPr>
-      </p:pic>
-      <p:sp>
-        <p:nvSpPr>
-          <p:cNvPr id="3" name="Shape 0"/>
-          <p:cNvSpPr/>
-          <p:nvPr/>
-        </p:nvSpPr>
-        <p:spPr>
-          <a:xfrm>
-            <a:off x="6400800" y="0"/>
-            <a:ext cx="5790895" cy="6858000"/>
-          </a:xfrm>
-          <a:prstGeom prst="rect">
-            <a:avLst/>
-          </a:prstGeom>
-          <a:solidFill>
-            <a:srgbClr val="0B1020">
-              <a:alpha val="70000"/>
-            </a:srgbClr>
-          </a:solidFill>
-          <a:ln w="12700">
-            <a:solidFill>
-              <a:srgbClr val="0B1020">
-                <a:alpha val="0"/>
-              </a:srgbClr>
-            </a:solidFill>
-            <a:prstDash val="solid"/>
-          </a:ln>
-        </p:spPr>
-        <p:txBody>
-          <a:bodyPr/>
-          <a:lstStyle/>
-          <a:p>
-            <a:endParaRPr lang="it-IT"/>
-          </a:p>
-        </p:txBody>
-      </p:sp>
-      <p:sp>
-        <p:nvSpPr>
-          <p:cNvPr id="4" name="Text 1"/>
-          <p:cNvSpPr/>
-          <p:nvPr/>
-        </p:nvSpPr>
-        <p:spPr>
-          <a:xfrm>
-            <a:off x="640080" y="777240"/>
-            <a:ext cx="3840480" cy="320040"/>
-          </a:xfrm>
-          <a:prstGeom prst="rect">
-            <a:avLst/>
-          </a:prstGeom>
-          <a:noFill/>
-          <a:ln/>
-        </p:spPr>
-        <p:txBody>
-          <a:bodyPr wrap="square" lIns="0" tIns="0" rIns="0" bIns="0" rtlCol="0" anchor="ctr"/>
-          <a:lstStyle/>
-          <a:p>
-            <a:pPr marL="0" indent="0">
-              <a:buNone/>
-            </a:pPr>
-            <a:r>
-              <a:rPr lang="en-US" sz="1500" b="1" dirty="0">
-                <a:solidFill>
-                  <a:srgbClr val="67E8F9"/>
-                </a:solidFill>
-              </a:rPr>
-              <a:t>Sintesi finale</a:t>
-            </a:r>
-            <a:endParaRPr lang="en-US" sz="1500" dirty="0"/>
-          </a:p>
-        </p:txBody>
-      </p:sp>
-      <p:sp>
-        <p:nvSpPr>
-          <p:cNvPr id="5" name="Text 2"/>
-          <p:cNvSpPr/>
-          <p:nvPr/>
-        </p:nvSpPr>
-        <p:spPr>
-          <a:xfrm>
-            <a:off x="640080" y="1234440"/>
-            <a:ext cx="5257800" cy="640080"/>
-          </a:xfrm>
-          <a:prstGeom prst="rect">
-            <a:avLst/>
-          </a:prstGeom>
-          <a:noFill/>
-          <a:ln/>
-        </p:spPr>
-        <p:txBody>
-          <a:bodyPr wrap="square" lIns="0" tIns="0" rIns="0" bIns="0" rtlCol="0" anchor="ctr">
-            <a:normAutofit fontScale="92500"/>
-          </a:bodyPr>
-          <a:lstStyle/>
-          <a:p>
-            <a:pPr marL="0" indent="0">
-              <a:buNone/>
-            </a:pPr>
-            <a:r>
-              <a:rPr lang="en-US" sz="3100" b="1" dirty="0">
-                <a:solidFill>
-                  <a:srgbClr val="FFFFFF"/>
-                </a:solidFill>
-              </a:rPr>
-              <a:t>Cosa abbiamo costruito finora</a:t>
-            </a:r>
-            <a:endParaRPr lang="en-US" sz="3100" dirty="0"/>
-          </a:p>
-        </p:txBody>
-      </p:sp>
-      <p:sp>
-        <p:nvSpPr>
-          <p:cNvPr id="6" name="Shape 3"/>
-          <p:cNvSpPr/>
-          <p:nvPr/>
-        </p:nvSpPr>
-        <p:spPr>
-          <a:xfrm>
-            <a:off x="777240" y="2404872"/>
-            <a:ext cx="100584" cy="100584"/>
-          </a:xfrm>
-          <a:prstGeom prst="ellipse">
-            <a:avLst/>
-          </a:prstGeom>
-          <a:solidFill>
-            <a:srgbClr val="67E8F9"/>
-          </a:solidFill>
-          <a:ln w="12700">
-            <a:solidFill>
-              <a:srgbClr val="67E8F9"/>
-            </a:solidFill>
-            <a:prstDash val="solid"/>
-          </a:ln>
-        </p:spPr>
-        <p:txBody>
-          <a:bodyPr/>
-          <a:lstStyle/>
-          <a:p>
-            <a:endParaRPr lang="it-IT"/>
-          </a:p>
-        </p:txBody>
-      </p:sp>
-      <p:sp>
-        <p:nvSpPr>
-          <p:cNvPr id="7" name="Text 4"/>
-          <p:cNvSpPr/>
-          <p:nvPr/>
-        </p:nvSpPr>
-        <p:spPr>
-          <a:xfrm>
-            <a:off x="1005840" y="2331720"/>
-            <a:ext cx="5029200" cy="320040"/>
-          </a:xfrm>
-          <a:prstGeom prst="rect">
-            <a:avLst/>
-          </a:prstGeom>
-          <a:noFill/>
-          <a:ln/>
-        </p:spPr>
-        <p:txBody>
-          <a:bodyPr wrap="square" lIns="127" tIns="127" rIns="127" bIns="127" rtlCol="0" anchor="ctr">
-            <a:normAutofit/>
-          </a:bodyPr>
-          <a:lstStyle/>
-          <a:p>
-            <a:pPr marL="0" indent="0">
-              <a:buNone/>
-            </a:pPr>
-            <a:r>
-              <a:rPr lang="en-US" sz="1420" dirty="0">
-                <a:solidFill>
-                  <a:srgbClr val="E2E8F0"/>
-                </a:solidFill>
-              </a:rPr>
-              <a:t>01 riconosce e corregge i componenti.</a:t>
-            </a:r>
-            <a:endParaRPr lang="en-US" sz="1420" dirty="0"/>
-          </a:p>
-        </p:txBody>
-      </p:sp>
-      <p:sp>
-        <p:nvSpPr>
-          <p:cNvPr id="8" name="Shape 5"/>
-          <p:cNvSpPr/>
-          <p:nvPr/>
-        </p:nvSpPr>
-        <p:spPr>
-          <a:xfrm>
-            <a:off x="777240" y="2816352"/>
-            <a:ext cx="100584" cy="100584"/>
-          </a:xfrm>
-          <a:prstGeom prst="ellipse">
-            <a:avLst/>
-          </a:prstGeom>
-          <a:solidFill>
-            <a:srgbClr val="67E8F9"/>
-          </a:solidFill>
-          <a:ln w="12700">
-            <a:solidFill>
-              <a:srgbClr val="67E8F9"/>
-            </a:solidFill>
-            <a:prstDash val="solid"/>
-          </a:ln>
-        </p:spPr>
-        <p:txBody>
-          <a:bodyPr/>
-          <a:lstStyle/>
-          <a:p>
-            <a:endParaRPr lang="it-IT"/>
-          </a:p>
-        </p:txBody>
-      </p:sp>
-      <p:sp>
-        <p:nvSpPr>
-          <p:cNvPr id="9" name="Text 6"/>
-          <p:cNvSpPr/>
-          <p:nvPr/>
-        </p:nvSpPr>
-        <p:spPr>
-          <a:xfrm>
-            <a:off x="1005840" y="2743200"/>
-            <a:ext cx="5029200" cy="320040"/>
-          </a:xfrm>
-          <a:prstGeom prst="rect">
-            <a:avLst/>
-          </a:prstGeom>
-          <a:noFill/>
-          <a:ln/>
-        </p:spPr>
-        <p:txBody>
-          <a:bodyPr wrap="square" lIns="127" tIns="127" rIns="127" bIns="127" rtlCol="0" anchor="ctr">
-            <a:normAutofit/>
-          </a:bodyPr>
-          <a:lstStyle/>
-          <a:p>
-            <a:pPr marL="0" indent="0">
-              <a:buNone/>
-            </a:pPr>
-            <a:r>
-              <a:rPr lang="en-US" sz="1420" dirty="0">
-                <a:solidFill>
-                  <a:srgbClr val="E2E8F0"/>
-                </a:solidFill>
-              </a:rPr>
-              <a:t>02 dà nomi stabili alle istanze.</a:t>
-            </a:r>
-            <a:endParaRPr lang="en-US" sz="1420" dirty="0"/>
-          </a:p>
-        </p:txBody>
-      </p:sp>
-      <p:sp>
-        <p:nvSpPr>
-          <p:cNvPr id="10" name="Shape 7"/>
-          <p:cNvSpPr/>
-          <p:nvPr/>
-        </p:nvSpPr>
-        <p:spPr>
-          <a:xfrm>
-            <a:off x="777240" y="3227832"/>
-            <a:ext cx="100584" cy="100584"/>
-          </a:xfrm>
-          <a:prstGeom prst="ellipse">
-            <a:avLst/>
-          </a:prstGeom>
-          <a:solidFill>
-            <a:srgbClr val="67E8F9"/>
-          </a:solidFill>
-          <a:ln w="12700">
-            <a:solidFill>
-              <a:srgbClr val="67E8F9"/>
-            </a:solidFill>
-            <a:prstDash val="solid"/>
-          </a:ln>
-        </p:spPr>
-        <p:txBody>
-          <a:bodyPr/>
-          <a:lstStyle/>
-          <a:p>
-            <a:endParaRPr lang="it-IT"/>
-          </a:p>
-        </p:txBody>
-      </p:sp>
-      <p:sp>
-        <p:nvSpPr>
-          <p:cNvPr id="11" name="Text 8"/>
-          <p:cNvSpPr/>
-          <p:nvPr/>
-        </p:nvSpPr>
-        <p:spPr>
-          <a:xfrm>
-            <a:off x="1005840" y="3154680"/>
-            <a:ext cx="5029200" cy="320040"/>
-          </a:xfrm>
-          <a:prstGeom prst="rect">
-            <a:avLst/>
-          </a:prstGeom>
-          <a:noFill/>
-          <a:ln/>
-        </p:spPr>
-        <p:txBody>
-          <a:bodyPr wrap="square" lIns="127" tIns="127" rIns="127" bIns="127" rtlCol="0" anchor="ctr">
-            <a:normAutofit/>
-          </a:bodyPr>
-          <a:lstStyle/>
-          <a:p>
-            <a:pPr marL="0" indent="0">
-              <a:buNone/>
-            </a:pPr>
-            <a:r>
-              <a:rPr lang="en-US" sz="1420" dirty="0">
-                <a:solidFill>
-                  <a:srgbClr val="E2E8F0"/>
-                </a:solidFill>
-              </a:rPr>
-              <a:t>03 trova terminali e semantica.</a:t>
-            </a:r>
-            <a:endParaRPr lang="en-US" sz="1420" dirty="0"/>
-          </a:p>
-        </p:txBody>
-      </p:sp>
-      <p:sp>
-        <p:nvSpPr>
-          <p:cNvPr id="12" name="Shape 9"/>
-          <p:cNvSpPr/>
-          <p:nvPr/>
-        </p:nvSpPr>
-        <p:spPr>
-          <a:xfrm>
-            <a:off x="777240" y="3639312"/>
-            <a:ext cx="100584" cy="100584"/>
-          </a:xfrm>
-          <a:prstGeom prst="ellipse">
-            <a:avLst/>
-          </a:prstGeom>
-          <a:solidFill>
-            <a:srgbClr val="67E8F9"/>
-          </a:solidFill>
-          <a:ln w="12700">
-            <a:solidFill>
-              <a:srgbClr val="67E8F9"/>
-            </a:solidFill>
-            <a:prstDash val="solid"/>
-          </a:ln>
-        </p:spPr>
-        <p:txBody>
-          <a:bodyPr/>
-          <a:lstStyle/>
-          <a:p>
-            <a:endParaRPr lang="it-IT"/>
-          </a:p>
-        </p:txBody>
-      </p:sp>
-      <p:sp>
-        <p:nvSpPr>
-          <p:cNvPr id="13" name="Text 10"/>
-          <p:cNvSpPr/>
-          <p:nvPr/>
-        </p:nvSpPr>
-        <p:spPr>
-          <a:xfrm>
-            <a:off x="1005840" y="3566160"/>
-            <a:ext cx="5029200" cy="320040"/>
-          </a:xfrm>
-          <a:prstGeom prst="rect">
-            <a:avLst/>
-          </a:prstGeom>
-          <a:noFill/>
-          <a:ln/>
-        </p:spPr>
-        <p:txBody>
-          <a:bodyPr wrap="square" lIns="127" tIns="127" rIns="127" bIns="127" rtlCol="0" anchor="ctr">
-            <a:normAutofit/>
-          </a:bodyPr>
-          <a:lstStyle/>
-          <a:p>
-            <a:pPr marL="0" indent="0">
-              <a:buNone/>
-            </a:pPr>
-            <a:r>
-              <a:rPr lang="en-US" sz="1420" dirty="0">
-                <a:solidFill>
-                  <a:srgbClr val="E2E8F0"/>
-                </a:solidFill>
-              </a:rPr>
-              <a:t>04 isola i wire come skeleton.</a:t>
-            </a:r>
-            <a:endParaRPr lang="en-US" sz="1420" dirty="0"/>
-          </a:p>
-        </p:txBody>
-      </p:sp>
-      <p:sp>
-        <p:nvSpPr>
-          <p:cNvPr id="14" name="Shape 11"/>
-          <p:cNvSpPr/>
-          <p:nvPr/>
-        </p:nvSpPr>
-        <p:spPr>
-          <a:xfrm>
-            <a:off x="777240" y="4050792"/>
-            <a:ext cx="100584" cy="100584"/>
-          </a:xfrm>
-          <a:prstGeom prst="ellipse">
-            <a:avLst/>
-          </a:prstGeom>
-          <a:solidFill>
-            <a:srgbClr val="67E8F9"/>
-          </a:solidFill>
-          <a:ln w="12700">
-            <a:solidFill>
-              <a:srgbClr val="67E8F9"/>
-            </a:solidFill>
-            <a:prstDash val="solid"/>
-          </a:ln>
-        </p:spPr>
-        <p:txBody>
-          <a:bodyPr/>
-          <a:lstStyle/>
-          <a:p>
-            <a:endParaRPr lang="it-IT"/>
-          </a:p>
-        </p:txBody>
-      </p:sp>
-      <p:sp>
-        <p:nvSpPr>
-          <p:cNvPr id="15" name="Text 12"/>
-          <p:cNvSpPr/>
-          <p:nvPr/>
-        </p:nvSpPr>
-        <p:spPr>
-          <a:xfrm>
-            <a:off x="1005840" y="3977640"/>
-            <a:ext cx="5029200" cy="320040"/>
-          </a:xfrm>
-          <a:prstGeom prst="rect">
-            <a:avLst/>
-          </a:prstGeom>
-          <a:noFill/>
-          <a:ln/>
-        </p:spPr>
-        <p:txBody>
-          <a:bodyPr wrap="square" lIns="127" tIns="127" rIns="127" bIns="127" rtlCol="0" anchor="ctr">
-            <a:normAutofit/>
-          </a:bodyPr>
-          <a:lstStyle/>
-          <a:p>
-            <a:pPr marL="0" indent="0">
-              <a:buNone/>
-            </a:pPr>
-            <a:r>
-              <a:rPr lang="en-US" sz="1420" dirty="0">
-                <a:solidFill>
-                  <a:srgbClr val="E2E8F0"/>
-                </a:solidFill>
-              </a:rPr>
-              <a:t>05 produce il JSON topologico minimale.</a:t>
-            </a:r>
-            <a:endParaRPr lang="en-US" sz="1420" dirty="0"/>
-          </a:p>
-        </p:txBody>
-      </p:sp>
-      <p:sp>
-        <p:nvSpPr>
-          <p:cNvPr id="16" name="Shape 13"/>
-          <p:cNvSpPr/>
-          <p:nvPr/>
-        </p:nvSpPr>
-        <p:spPr>
-          <a:xfrm>
-            <a:off x="777240" y="4937760"/>
-            <a:ext cx="5166360" cy="868680"/>
-          </a:xfrm>
-          <a:prstGeom prst="roundRect">
-            <a:avLst>
-              <a:gd name="adj" fmla="val 12632"/>
-            </a:avLst>
-          </a:prstGeom>
-          <a:solidFill>
-            <a:srgbClr val="111827">
-              <a:alpha val="95000"/>
-            </a:srgbClr>
-          </a:solidFill>
-          <a:ln w="12700">
-            <a:solidFill>
-              <a:srgbClr val="334155"/>
-            </a:solidFill>
-            <a:prstDash val="solid"/>
-          </a:ln>
-        </p:spPr>
-        <p:txBody>
-          <a:bodyPr/>
-          <a:lstStyle/>
-          <a:p>
-            <a:endParaRPr lang="it-IT"/>
-          </a:p>
-        </p:txBody>
-      </p:sp>
-      <p:sp>
-        <p:nvSpPr>
-          <p:cNvPr id="17" name="Text 14"/>
-          <p:cNvSpPr/>
-          <p:nvPr/>
-        </p:nvSpPr>
-        <p:spPr>
-          <a:xfrm>
-            <a:off x="1024128" y="5157216"/>
-            <a:ext cx="1645920" cy="164592"/>
-          </a:xfrm>
-          <a:prstGeom prst="rect">
-            <a:avLst/>
-          </a:prstGeom>
-          <a:noFill/>
-          <a:ln/>
-        </p:spPr>
-        <p:txBody>
-          <a:bodyPr wrap="square" lIns="0" tIns="0" rIns="0" bIns="0" rtlCol="0" anchor="ctr"/>
-          <a:lstStyle/>
-          <a:p>
-            <a:pPr marL="0" indent="0">
-              <a:buNone/>
-            </a:pPr>
-            <a:r>
-              <a:rPr lang="en-US" sz="1050" b="1" dirty="0">
-                <a:solidFill>
-                  <a:srgbClr val="A5F3FC"/>
-                </a:solidFill>
-              </a:rPr>
-              <a:t>Messaggio chiave</a:t>
-            </a:r>
-            <a:endParaRPr lang="en-US" sz="1050" dirty="0"/>
-          </a:p>
-        </p:txBody>
-      </p:sp>
-      <p:sp>
-        <p:nvSpPr>
-          <p:cNvPr id="18" name="Text 15"/>
-          <p:cNvSpPr/>
-          <p:nvPr/>
-        </p:nvSpPr>
-        <p:spPr>
-          <a:xfrm>
-            <a:off x="1024128" y="5413248"/>
-            <a:ext cx="4572000" cy="228600"/>
-          </a:xfrm>
-          <a:prstGeom prst="rect">
-            <a:avLst/>
-          </a:prstGeom>
-          <a:noFill/>
-          <a:ln/>
-        </p:spPr>
-        <p:txBody>
-          <a:bodyPr wrap="square" lIns="0" tIns="0" rIns="0" bIns="0" rtlCol="0" anchor="ctr">
-            <a:normAutofit fontScale="77500" lnSpcReduction="20000"/>
-          </a:bodyPr>
-          <a:lstStyle/>
-          <a:p>
-            <a:pPr marL="0" indent="0">
-              <a:buNone/>
-            </a:pPr>
-            <a:r>
-              <a:rPr lang="en-US" sz="1220" dirty="0">
-                <a:solidFill>
-                  <a:srgbClr val="FFFFFF"/>
-                </a:solidFill>
-              </a:rPr>
-              <a:t>Il JSON finale è il ponte tra visione artificiale e ragionamento AI: non è solo detection, ma una topologia interrogabile.</a:t>
-            </a:r>
-            <a:endParaRPr lang="en-US" sz="1220" dirty="0"/>
           </a:p>
         </p:txBody>
       </p:sp>
@@ -32342,20 +30378,20 @@
 </file>
 
 <file path=customXml/item2.xml><?xml version="1.0" encoding="utf-8"?>
+<p:properties xmlns:p="http://schemas.microsoft.com/office/2006/metadata/properties" xmlns:xsi="http://www.w3.org/2001/XMLSchema-instance" xmlns:pc="http://schemas.microsoft.com/office/infopath/2007/PartnerControls">
+  <documentManagement>
+    <_activity xmlns="4b64ee43-c309-4a11-a8e8-00d42015a2cd" xsi:nil="true"/>
+  </documentManagement>
+</p:properties>
+</file>
+
+<file path=customXml/item3.xml><?xml version="1.0" encoding="utf-8"?>
 <?mso-contentType ?>
 <FormTemplates xmlns="http://schemas.microsoft.com/sharepoint/v3/contenttype/forms">
   <Display>DocumentLibraryForm</Display>
   <Edit>DocumentLibraryForm</Edit>
   <New>DocumentLibraryForm</New>
 </FormTemplates>
-</file>
-
-<file path=customXml/item3.xml><?xml version="1.0" encoding="utf-8"?>
-<p:properties xmlns:p="http://schemas.microsoft.com/office/2006/metadata/properties" xmlns:xsi="http://www.w3.org/2001/XMLSchema-instance" xmlns:pc="http://schemas.microsoft.com/office/infopath/2007/PartnerControls">
-  <documentManagement>
-    <_activity xmlns="4b64ee43-c309-4a11-a8e8-00d42015a2cd" xsi:nil="true"/>
-  </documentManagement>
-</p:properties>
 </file>
 
 <file path=customXml/itemProps1.xml><?xml version="1.0" encoding="utf-8"?>
@@ -32377,14 +30413,6 @@
 </file>
 
 <file path=customXml/itemProps2.xml><?xml version="1.0" encoding="utf-8"?>
-<ds:datastoreItem xmlns:ds="http://schemas.openxmlformats.org/officeDocument/2006/customXml" ds:itemID="{512CCA92-3FFA-4B18-8825-6002805AEE9D}">
-  <ds:schemaRefs>
-    <ds:schemaRef ds:uri="http://schemas.microsoft.com/sharepoint/v3/contenttype/forms"/>
-  </ds:schemaRefs>
-</ds:datastoreItem>
-</file>
-
-<file path=customXml/itemProps3.xml><?xml version="1.0" encoding="utf-8"?>
 <ds:datastoreItem xmlns:ds="http://schemas.openxmlformats.org/officeDocument/2006/customXml" ds:itemID="{82B2CC27-3E32-47AF-AABF-86AD97E17D4A}">
   <ds:schemaRefs>
     <ds:schemaRef ds:uri="http://purl.org/dc/dcmitype/"/>
@@ -32398,4 +30426,12 @@
     <ds:schemaRef ds:uri="4b64ee43-c309-4a11-a8e8-00d42015a2cd"/>
   </ds:schemaRefs>
 </ds:datastoreItem>
+</file>
+
+<file path=customXml/itemProps3.xml><?xml version="1.0" encoding="utf-8"?>
+<ds:datastoreItem xmlns:ds="http://schemas.openxmlformats.org/officeDocument/2006/customXml" ds:itemID="{512CCA92-3FFA-4B18-8825-6002805AEE9D}">
+  <ds:schemaRefs>
+    <ds:schemaRef ds:uri="http://schemas.microsoft.com/sharepoint/v3/contenttype/forms"/>
+  </ds:schemaRefs>
+</ds:datastoreItem>
 </file>